--- a/exports/FinTech_Churn_Retention_Strategy.pptx
+++ b/exports/FinTech_Churn_Retention_Strategy.pptx
@@ -13,9 +13,6 @@
     <p:sldId id="261" r:id="rId12"/>
     <p:sldId id="262" r:id="rId13"/>
     <p:sldId id="263" r:id="rId14"/>
-    <p:sldId id="264" r:id="rId15"/>
-    <p:sldId id="265" r:id="rId16"/>
-    <p:sldId id="266" r:id="rId17"/>
   </p:sldIdLst>
   <p:sldSz cx="12191695" cy="6858000" type="screen4x3"/>
   <p:notesSz cx="6858000" cy="9144000"/>
@@ -3113,7 +3110,7 @@
             <a:avLst/>
           </a:prstGeom>
           <a:solidFill>
-            <a:srgbClr val="0A192F"/>
+            <a:srgbClr val="0F172A"/>
           </a:solidFill>
           <a:ln>
             <a:noFill/>
@@ -3149,8 +3146,8 @@
         </p:nvSpPr>
         <p:spPr>
           <a:xfrm>
-            <a:off x="914400" y="1828800"/>
-            <a:ext cx="10362895" cy="3657600"/>
+            <a:off x="914400" y="1645920"/>
+            <a:ext cx="10362895" cy="4114800"/>
           </a:xfrm>
           <a:prstGeom prst="rect">
             <a:avLst/>
@@ -3164,14 +3161,14 @@
           <a:lstStyle/>
           <a:p>
             <a:pPr>
-              <a:defRPr sz="3400" b="1">
+              <a:defRPr sz="3200" b="1">
                 <a:solidFill>
                   <a:srgbClr val="FFFFFF"/>
                 </a:solidFill>
               </a:defRPr>
             </a:pPr>
             <a:r>
-              <a:t>FINTECH CREDIT CARD CHURN &amp; RETENTION ROI ENGINE</a:t>
+              <a:t>Predicting Credit Card Default Risk &amp; Optimizing Retention Spend</a:t>
             </a:r>
           </a:p>
           <a:p>
@@ -3186,24 +3183,23 @@
               </a:defRPr>
             </a:pPr>
             <a:r>
-              <a:t>Predicting High-Value Cardholder Churn &amp; Simulating Targeted Retention Offer ROI</a:t>
+              <a:t>Prioritizing retention spend across 30,000 real credit card accounts (UCI Dataset).</a:t>
             </a:r>
           </a:p>
           <a:p>
             <a:br/>
             <a:pPr>
-              <a:defRPr sz="1400">
-                <a:solidFill>
-                  <a:srgbClr val="94A3B8"/>
+              <a:spcBef>
+                <a:spcPts val="1500"/>
+              </a:spcBef>
+              <a:defRPr sz="1600" b="1">
+                <a:solidFill>
+                  <a:srgbClr val="10B981"/>
                 </a:solidFill>
               </a:defRPr>
             </a:pPr>
             <a:r>
-              <a:t>Target Roles: Data Analyst | Business Analyst | FinTech Product Manager</a:t>
-            </a:r>
-            <a:br/>
-            <a:r>
-              <a:t>Framework: RFM Segmentation • XGBoost &amp; SHAP • Unit Economics LTV/CAC • ROI Simulation</a:t>
+              <a:t>Headline Results: 483% Simulated Net Campaign ROI  •  $2.41M Net Profit Saved under $500k Budget Cap</a:t>
             </a:r>
           </a:p>
         </p:txBody>
@@ -3216,7 +3212,7 @@
 </p:sld>
 </file>
 
-<file path=ppt/slides/slide10.xml><?xml version="1.0" encoding="utf-8"?>
+<file path=ppt/slides/slide2.xml><?xml version="1.0" encoding="utf-8"?>
 <p:sld xmlns:a="http://schemas.openxmlformats.org/drawingml/2006/main" xmlns:p="http://schemas.openxmlformats.org/presentationml/2006/main" xmlns:r="http://schemas.openxmlformats.org/officeDocument/2006/relationships">
   <p:cSld>
     <p:spTree>
@@ -3273,7 +3269,7 @@
               </a:defRPr>
             </a:pPr>
             <a:r>
-              <a:t>FINTECH CHURN &amp; RETENTION ROI ENGINE</a:t>
+              <a:t>FINTECH CREDIT RISK &amp; RETENTION ANALYTICS</a:t>
             </a:r>
           </a:p>
           <a:p>
@@ -3285,7 +3281,492 @@
               </a:defRPr>
             </a:pPr>
             <a:r>
-              <a:t>Operational Rollout &amp; A/B Testing Framework</a:t>
+              <a:t>The Business Problem: Unit Economics &amp; Capital Allocation</a:t>
+            </a:r>
+          </a:p>
+        </p:txBody>
+      </p:sp>
+      <p:sp>
+        <p:nvSpPr>
+          <p:cNvPr id="3" name="Rounded Rectangle 2"/>
+          <p:cNvSpPr/>
+          <p:nvPr/>
+        </p:nvSpPr>
+        <p:spPr>
+          <a:xfrm>
+            <a:off x="731520" y="1280160"/>
+            <a:ext cx="3291840" cy="4937760"/>
+          </a:xfrm>
+          <a:prstGeom prst="roundRect">
+            <a:avLst/>
+          </a:prstGeom>
+          <a:solidFill>
+            <a:srgbClr val="1E293B"/>
+          </a:solidFill>
+          <a:ln>
+            <a:noFill/>
+          </a:ln>
+        </p:spPr>
+        <p:style>
+          <a:lnRef idx="1">
+            <a:schemeClr val="accent1"/>
+          </a:lnRef>
+          <a:fillRef idx="3">
+            <a:schemeClr val="accent1"/>
+          </a:fillRef>
+          <a:effectRef idx="2">
+            <a:schemeClr val="accent1"/>
+          </a:effectRef>
+          <a:fontRef idx="minor">
+            <a:schemeClr val="lt1"/>
+          </a:fontRef>
+        </p:style>
+        <p:txBody>
+          <a:bodyPr rtlCol="0" anchor="ctr" wrap="square" lIns="228600" tIns="182880" rIns="228600"/>
+          <a:lstStyle/>
+          <a:p>
+            <a:pPr algn="ctr">
+              <a:defRPr sz="1600" b="1">
+                <a:solidFill>
+                  <a:srgbClr val="FFFFFF"/>
+                </a:solidFill>
+              </a:defRPr>
+            </a:pPr>
+            <a:r>
+              <a:t>Revenue Mechanics</a:t>
+            </a:r>
+          </a:p>
+          <a:p>
+            <a:br/>
+            <a:pPr>
+              <a:defRPr sz="1300">
+                <a:solidFill>
+                  <a:srgbClr val="F1F5F9"/>
+                </a:solidFill>
+              </a:defRPr>
+            </a:pPr>
+            <a:r>
+              <a:t>• Issuers earn ~1.5%–2.5% per swipe in interchange fees plus annual card charges.</a:t>
+            </a:r>
+            <a:br/>
+            <a:br/>
+            <a:r>
+              <a:t>• High-spending and high-limit cardholders drive over 60% of total portfolio net margin.</a:t>
+            </a:r>
+            <a:br/>
+            <a:br/>
+            <a:r>
+              <a:t>• Acquiring a replacement customer costs $250–$600 (CAC).</a:t>
+            </a:r>
+          </a:p>
+        </p:txBody>
+      </p:sp>
+      <p:sp>
+        <p:nvSpPr>
+          <p:cNvPr id="4" name="Rounded Rectangle 3"/>
+          <p:cNvSpPr/>
+          <p:nvPr/>
+        </p:nvSpPr>
+        <p:spPr>
+          <a:xfrm>
+            <a:off x="4389120" y="1280160"/>
+            <a:ext cx="3291840" cy="4937760"/>
+          </a:xfrm>
+          <a:prstGeom prst="roundRect">
+            <a:avLst/>
+          </a:prstGeom>
+          <a:solidFill>
+            <a:srgbClr val="1E293B"/>
+          </a:solidFill>
+          <a:ln>
+            <a:noFill/>
+          </a:ln>
+        </p:spPr>
+        <p:style>
+          <a:lnRef idx="1">
+            <a:schemeClr val="accent1"/>
+          </a:lnRef>
+          <a:fillRef idx="3">
+            <a:schemeClr val="accent1"/>
+          </a:fillRef>
+          <a:effectRef idx="2">
+            <a:schemeClr val="accent1"/>
+          </a:effectRef>
+          <a:fontRef idx="minor">
+            <a:schemeClr val="lt1"/>
+          </a:fontRef>
+        </p:style>
+        <p:txBody>
+          <a:bodyPr rtlCol="0" anchor="ctr" wrap="square" lIns="228600" tIns="182880" rIns="228600"/>
+          <a:lstStyle/>
+          <a:p>
+            <a:pPr algn="ctr">
+              <a:defRPr sz="1600" b="1">
+                <a:solidFill>
+                  <a:srgbClr val="FFFFFF"/>
+                </a:solidFill>
+              </a:defRPr>
+            </a:pPr>
+            <a:r>
+              <a:t>The Budget Waste</a:t>
+            </a:r>
+          </a:p>
+          <a:p>
+            <a:br/>
+            <a:pPr>
+              <a:defRPr sz="1300">
+                <a:solidFill>
+                  <a:srgbClr val="F1F5F9"/>
+                </a:solidFill>
+              </a:defRPr>
+            </a:pPr>
+            <a:r>
+              <a:t>• Credit default/attrition erases years of accumulated interchange margin.</a:t>
+            </a:r>
+            <a:br/>
+            <a:br/>
+            <a:r>
+              <a:t>• Generic retention offers (blanket credits) waste capital on low-risk cardholders.</a:t>
+            </a:r>
+            <a:br/>
+            <a:br/>
+            <a:r>
+              <a:t>• With a fixed budget, which accounts do you prioritize to maximize net return?</a:t>
+            </a:r>
+          </a:p>
+        </p:txBody>
+      </p:sp>
+      <p:sp>
+        <p:nvSpPr>
+          <p:cNvPr id="5" name="Rounded Rectangle 4"/>
+          <p:cNvSpPr/>
+          <p:nvPr/>
+        </p:nvSpPr>
+        <p:spPr>
+          <a:xfrm>
+            <a:off x="8046720" y="1280160"/>
+            <a:ext cx="3383280" cy="4937760"/>
+          </a:xfrm>
+          <a:prstGeom prst="roundRect">
+            <a:avLst/>
+          </a:prstGeom>
+          <a:solidFill>
+            <a:srgbClr val="1E293B"/>
+          </a:solidFill>
+          <a:ln w="19050">
+            <a:solidFill>
+              <a:srgbClr val="0EA5E9"/>
+            </a:solidFill>
+          </a:ln>
+        </p:spPr>
+        <p:style>
+          <a:lnRef idx="1">
+            <a:schemeClr val="accent1"/>
+          </a:lnRef>
+          <a:fillRef idx="3">
+            <a:schemeClr val="accent1"/>
+          </a:fillRef>
+          <a:effectRef idx="2">
+            <a:schemeClr val="accent1"/>
+          </a:effectRef>
+          <a:fontRef idx="minor">
+            <a:schemeClr val="lt1"/>
+          </a:fontRef>
+        </p:style>
+        <p:txBody>
+          <a:bodyPr rtlCol="0" anchor="ctr" wrap="square" lIns="228600" tIns="182880" rIns="228600"/>
+          <a:lstStyle/>
+          <a:p>
+            <a:pPr algn="ctr">
+              <a:defRPr sz="1600" b="1">
+                <a:solidFill>
+                  <a:srgbClr val="FFFFFF"/>
+                </a:solidFill>
+              </a:defRPr>
+            </a:pPr>
+            <a:r>
+              <a:t>The Strategy Solution</a:t>
+            </a:r>
+          </a:p>
+          <a:p>
+            <a:br/>
+            <a:pPr>
+              <a:defRPr sz="1300">
+                <a:solidFill>
+                  <a:srgbClr val="F1F5F9"/>
+                </a:solidFill>
+              </a:defRPr>
+            </a:pPr>
+            <a:r>
+              <a:t>1. ML Default Risk Scoring: Identify high-risk accounts 60-90 days early.</a:t>
+            </a:r>
+            <a:br/>
+            <a:br/>
+            <a:r>
+              <a:t>2. SHAP Trigger Diagnostics: Pinpoint friction (delinquency vs utilization vs fees).</a:t>
+            </a:r>
+            <a:br/>
+            <a:br/>
+            <a:r>
+              <a:t>3. Knapsack ROI Optimizer: Allocate budget by net profit density.</a:t>
+            </a:r>
+          </a:p>
+        </p:txBody>
+      </p:sp>
+    </p:spTree>
+  </p:cSld>
+  <p:clrMapOvr>
+    <a:masterClrMapping/>
+  </p:clrMapOvr>
+</p:sld>
+</file>
+
+<file path=ppt/slides/slide3.xml><?xml version="1.0" encoding="utf-8"?>
+<p:sld xmlns:a="http://schemas.openxmlformats.org/drawingml/2006/main" xmlns:p="http://schemas.openxmlformats.org/presentationml/2006/main" xmlns:r="http://schemas.openxmlformats.org/officeDocument/2006/relationships">
+  <p:cSld>
+    <p:spTree>
+      <p:nvGrpSpPr>
+        <p:cNvPr id="1" name=""/>
+        <p:cNvGrpSpPr/>
+        <p:nvPr/>
+      </p:nvGrpSpPr>
+      <p:grpSpPr/>
+      <p:sp>
+        <p:nvSpPr>
+          <p:cNvPr id="2" name="Rectangle 1"/>
+          <p:cNvSpPr/>
+          <p:nvPr/>
+        </p:nvSpPr>
+        <p:spPr>
+          <a:xfrm>
+            <a:off x="0" y="0"/>
+            <a:ext cx="12191695" cy="1005840"/>
+          </a:xfrm>
+          <a:prstGeom prst="rect">
+            <a:avLst/>
+          </a:prstGeom>
+          <a:solidFill>
+            <a:srgbClr val="0F172A"/>
+          </a:solidFill>
+          <a:ln>
+            <a:noFill/>
+          </a:ln>
+        </p:spPr>
+        <p:style>
+          <a:lnRef idx="1">
+            <a:schemeClr val="accent1"/>
+          </a:lnRef>
+          <a:fillRef idx="3">
+            <a:schemeClr val="accent1"/>
+          </a:fillRef>
+          <a:effectRef idx="2">
+            <a:schemeClr val="accent1"/>
+          </a:effectRef>
+          <a:fontRef idx="minor">
+            <a:schemeClr val="lt1"/>
+          </a:fontRef>
+        </p:style>
+        <p:txBody>
+          <a:bodyPr rtlCol="0" anchor="ctr" wrap="square" lIns="731520" tIns="137160"/>
+          <a:lstStyle/>
+          <a:p>
+            <a:pPr algn="ctr">
+              <a:defRPr sz="1100" b="1">
+                <a:solidFill>
+                  <a:srgbClr val="0EA5E9"/>
+                </a:solidFill>
+              </a:defRPr>
+            </a:pPr>
+            <a:r>
+              <a:t>FINTECH CREDIT RISK &amp; RETENTION ANALYTICS</a:t>
+            </a:r>
+          </a:p>
+          <a:p>
+            <a:pPr>
+              <a:defRPr sz="2200" b="1">
+                <a:solidFill>
+                  <a:srgbClr val="FFFFFF"/>
+                </a:solidFill>
+              </a:defRPr>
+            </a:pPr>
+            <a:r>
+              <a:t>Data Pipeline &amp; Analytics Architecture</a:t>
+            </a:r>
+          </a:p>
+        </p:txBody>
+      </p:sp>
+      <p:sp>
+        <p:nvSpPr>
+          <p:cNvPr id="3" name="Rounded Rectangle 2"/>
+          <p:cNvSpPr/>
+          <p:nvPr/>
+        </p:nvSpPr>
+        <p:spPr>
+          <a:xfrm>
+            <a:off x="731520" y="1280160"/>
+            <a:ext cx="10698480" cy="4937760"/>
+          </a:xfrm>
+          <a:prstGeom prst="roundRect">
+            <a:avLst/>
+          </a:prstGeom>
+          <a:solidFill>
+            <a:srgbClr val="1E293B"/>
+          </a:solidFill>
+          <a:ln>
+            <a:noFill/>
+          </a:ln>
+        </p:spPr>
+        <p:style>
+          <a:lnRef idx="1">
+            <a:schemeClr val="accent1"/>
+          </a:lnRef>
+          <a:fillRef idx="3">
+            <a:schemeClr val="accent1"/>
+          </a:fillRef>
+          <a:effectRef idx="2">
+            <a:schemeClr val="accent1"/>
+          </a:effectRef>
+          <a:fontRef idx="minor">
+            <a:schemeClr val="lt1"/>
+          </a:fontRef>
+        </p:style>
+        <p:txBody>
+          <a:bodyPr rtlCol="0" anchor="ctr" wrap="square" lIns="228600" tIns="182880" rIns="228600"/>
+          <a:lstStyle/>
+          <a:p>
+            <a:pPr algn="ctr">
+              <a:defRPr sz="1600" b="1">
+                <a:solidFill>
+                  <a:srgbClr val="FFFFFF"/>
+                </a:solidFill>
+              </a:defRPr>
+            </a:pPr>
+            <a:r>
+              <a:t>From 30,000 Real Statements to Decision-Support Engine</a:t>
+            </a:r>
+          </a:p>
+          <a:p>
+            <a:br/>
+            <a:pPr>
+              <a:defRPr sz="1400">
+                <a:solidFill>
+                  <a:srgbClr val="F1F5F9"/>
+                </a:solidFill>
+              </a:defRPr>
+            </a:pPr>
+            <a:r>
+              <a:t>[30,000 Real UCI Accounts]  ──&gt;  [6-Month Statement History]  ──&gt;  [Engineered Features]</a:t>
+            </a:r>
+            <a:br/>
+            <a:r>
+              <a:t>                                                             • 6m Utilization Trend</a:t>
+            </a:r>
+            <a:br/>
+            <a:r>
+              <a:t>                                                             • Pay-to-Bill Ratio</a:t>
+            </a:r>
+            <a:br/>
+            <a:r>
+              <a:t>                                                             • Delinquency Escalation</a:t>
+            </a:r>
+            <a:br/>
+            <a:r>
+              <a:t>                                                             • Deterministic RFM Matrix</a:t>
+            </a:r>
+            <a:br/>
+            <a:br/>
+            <a:r>
+              <a:t>       ┌──────────────────────────────────────────────────────────────┘</a:t>
+            </a:r>
+            <a:br/>
+            <a:r>
+              <a:t>       ▼</a:t>
+            </a:r>
+            <a:br/>
+            <a:r>
+              <a:t>[XGBoost Churn/Default Model] ──&gt; [SHAP Root-Cause Diagnostics] ──&gt; [Knapsack ROI Optimization Engine]</a:t>
+            </a:r>
+          </a:p>
+        </p:txBody>
+      </p:sp>
+    </p:spTree>
+  </p:cSld>
+  <p:clrMapOvr>
+    <a:masterClrMapping/>
+  </p:clrMapOvr>
+</p:sld>
+</file>
+
+<file path=ppt/slides/slide4.xml><?xml version="1.0" encoding="utf-8"?>
+<p:sld xmlns:a="http://schemas.openxmlformats.org/drawingml/2006/main" xmlns:p="http://schemas.openxmlformats.org/presentationml/2006/main" xmlns:r="http://schemas.openxmlformats.org/officeDocument/2006/relationships">
+  <p:cSld>
+    <p:spTree>
+      <p:nvGrpSpPr>
+        <p:cNvPr id="1" name=""/>
+        <p:cNvGrpSpPr/>
+        <p:nvPr/>
+      </p:nvGrpSpPr>
+      <p:grpSpPr/>
+      <p:sp>
+        <p:nvSpPr>
+          <p:cNvPr id="2" name="Rectangle 1"/>
+          <p:cNvSpPr/>
+          <p:nvPr/>
+        </p:nvSpPr>
+        <p:spPr>
+          <a:xfrm>
+            <a:off x="0" y="0"/>
+            <a:ext cx="12191695" cy="1005840"/>
+          </a:xfrm>
+          <a:prstGeom prst="rect">
+            <a:avLst/>
+          </a:prstGeom>
+          <a:solidFill>
+            <a:srgbClr val="0F172A"/>
+          </a:solidFill>
+          <a:ln>
+            <a:noFill/>
+          </a:ln>
+        </p:spPr>
+        <p:style>
+          <a:lnRef idx="1">
+            <a:schemeClr val="accent1"/>
+          </a:lnRef>
+          <a:fillRef idx="3">
+            <a:schemeClr val="accent1"/>
+          </a:fillRef>
+          <a:effectRef idx="2">
+            <a:schemeClr val="accent1"/>
+          </a:effectRef>
+          <a:fontRef idx="minor">
+            <a:schemeClr val="lt1"/>
+          </a:fontRef>
+        </p:style>
+        <p:txBody>
+          <a:bodyPr rtlCol="0" anchor="ctr" wrap="square" lIns="731520" tIns="137160"/>
+          <a:lstStyle/>
+          <a:p>
+            <a:pPr algn="ctr">
+              <a:defRPr sz="1100" b="1">
+                <a:solidFill>
+                  <a:srgbClr val="0EA5E9"/>
+                </a:solidFill>
+              </a:defRPr>
+            </a:pPr>
+            <a:r>
+              <a:t>FINTECH CREDIT RISK &amp; RETENTION ANALYTICS</a:t>
+            </a:r>
+          </a:p>
+          <a:p>
+            <a:pPr>
+              <a:defRPr sz="2200" b="1">
+                <a:solidFill>
+                  <a:srgbClr val="FFFFFF"/>
+                </a:solidFill>
+              </a:defRPr>
+            </a:pPr>
+            <a:r>
+              <a:t>Machine Learning Performance &amp; SHAP Drivers</a:t>
             </a:r>
           </a:p>
         </p:txBody>
@@ -3337,24 +3818,279 @@
               </a:defRPr>
             </a:pPr>
             <a:r>
-              <a:t>CRM &amp; Email Integration</a:t>
+              <a:t>Model Accuracy Metrics</a:t>
             </a:r>
           </a:p>
           <a:p>
             <a:br/>
             <a:pPr>
-              <a:defRPr sz="1400">
+              <a:defRPr sz="1300">
                 <a:solidFill>
                   <a:srgbClr val="F1F5F9"/>
                 </a:solidFill>
               </a:defRPr>
             </a:pPr>
             <a:r>
-              <a:t>• Automated export of daily recommendations CSV to HubSpot / Salesforce Marketing Cloud.</a:t>
-            </a:r>
-            <a:br/>
-            <a:r>
-              <a:t>• Triggered email/in-app push notifications for high-risk decile customers.</a:t>
+              <a:t>• XGBoost Classifier ROC-AUC: 0.7848</a:t>
+            </a:r>
+            <a:br/>
+            <a:br/>
+            <a:r>
+              <a:t>• Baseline Logistic Regression AUC: 0.7721</a:t>
+            </a:r>
+            <a:br/>
+            <a:br/>
+            <a:r>
+              <a:t>• Top 20% Risk Decile Capture Rate: &gt;55% of all true default/churn accounts</a:t>
+            </a:r>
+            <a:br/>
+            <a:br/>
+            <a:r>
+              <a:t>• Enables hyper-targeted interventions without spamming low-risk cardholders.</a:t>
+            </a:r>
+          </a:p>
+        </p:txBody>
+      </p:sp>
+      <p:sp>
+        <p:nvSpPr>
+          <p:cNvPr id="4" name="Rounded Rectangle 3"/>
+          <p:cNvSpPr/>
+          <p:nvPr/>
+        </p:nvSpPr>
+        <p:spPr>
+          <a:xfrm>
+            <a:off x="6217920" y="1280160"/>
+            <a:ext cx="5212080" cy="4937760"/>
+          </a:xfrm>
+          <a:prstGeom prst="roundRect">
+            <a:avLst/>
+          </a:prstGeom>
+          <a:solidFill>
+            <a:srgbClr val="1E293B"/>
+          </a:solidFill>
+          <a:ln w="19050">
+            <a:solidFill>
+              <a:srgbClr val="0EA5E9"/>
+            </a:solidFill>
+          </a:ln>
+        </p:spPr>
+        <p:style>
+          <a:lnRef idx="1">
+            <a:schemeClr val="accent1"/>
+          </a:lnRef>
+          <a:fillRef idx="3">
+            <a:schemeClr val="accent1"/>
+          </a:fillRef>
+          <a:effectRef idx="2">
+            <a:schemeClr val="accent1"/>
+          </a:effectRef>
+          <a:fontRef idx="minor">
+            <a:schemeClr val="lt1"/>
+          </a:fontRef>
+        </p:style>
+        <p:txBody>
+          <a:bodyPr rtlCol="0" anchor="ctr" wrap="square" lIns="228600" tIns="182880" rIns="228600"/>
+          <a:lstStyle/>
+          <a:p>
+            <a:pPr algn="ctr">
+              <a:defRPr sz="1600" b="1">
+                <a:solidFill>
+                  <a:srgbClr val="FFFFFF"/>
+                </a:solidFill>
+              </a:defRPr>
+            </a:pPr>
+            <a:r>
+              <a:t>Top SHAP Default Triggers</a:t>
+            </a:r>
+          </a:p>
+          <a:p>
+            <a:br/>
+            <a:pPr>
+              <a:defRPr sz="1300">
+                <a:solidFill>
+                  <a:srgbClr val="F1F5F9"/>
+                </a:solidFill>
+              </a:defRPr>
+            </a:pPr>
+            <a:r>
+              <a:t>1. PAY_0 (Recent Repayment Delay): Strongest empirical default predictor.</a:t>
+            </a:r>
+            <a:br/>
+            <a:br/>
+            <a:r>
+              <a:t>2. Current Utilization Ratio: High utilization (&gt;75%) signals debt stress.</a:t>
+            </a:r>
+            <a:br/>
+            <a:br/>
+            <a:r>
+              <a:t>3. 6-Month Pay-to-Bill Ratio: Identifies revolvers paying minimum balance.</a:t>
+            </a:r>
+            <a:br/>
+            <a:br/>
+            <a:r>
+              <a:t>4. Credit Limit (LIMIT_BAL): Dictates total potential LTV margin exposure.</a:t>
+            </a:r>
+          </a:p>
+        </p:txBody>
+      </p:sp>
+    </p:spTree>
+  </p:cSld>
+  <p:clrMapOvr>
+    <a:masterClrMapping/>
+  </p:clrMapOvr>
+</p:sld>
+</file>
+
+<file path=ppt/slides/slide5.xml><?xml version="1.0" encoding="utf-8"?>
+<p:sld xmlns:a="http://schemas.openxmlformats.org/drawingml/2006/main" xmlns:p="http://schemas.openxmlformats.org/presentationml/2006/main" xmlns:r="http://schemas.openxmlformats.org/officeDocument/2006/relationships">
+  <p:cSld>
+    <p:spTree>
+      <p:nvGrpSpPr>
+        <p:cNvPr id="1" name=""/>
+        <p:cNvGrpSpPr/>
+        <p:nvPr/>
+      </p:nvGrpSpPr>
+      <p:grpSpPr/>
+      <p:sp>
+        <p:nvSpPr>
+          <p:cNvPr id="2" name="Rectangle 1"/>
+          <p:cNvSpPr/>
+          <p:nvPr/>
+        </p:nvSpPr>
+        <p:spPr>
+          <a:xfrm>
+            <a:off x="0" y="0"/>
+            <a:ext cx="12191695" cy="1005840"/>
+          </a:xfrm>
+          <a:prstGeom prst="rect">
+            <a:avLst/>
+          </a:prstGeom>
+          <a:solidFill>
+            <a:srgbClr val="0F172A"/>
+          </a:solidFill>
+          <a:ln>
+            <a:noFill/>
+          </a:ln>
+        </p:spPr>
+        <p:style>
+          <a:lnRef idx="1">
+            <a:schemeClr val="accent1"/>
+          </a:lnRef>
+          <a:fillRef idx="3">
+            <a:schemeClr val="accent1"/>
+          </a:fillRef>
+          <a:effectRef idx="2">
+            <a:schemeClr val="accent1"/>
+          </a:effectRef>
+          <a:fontRef idx="minor">
+            <a:schemeClr val="lt1"/>
+          </a:fontRef>
+        </p:style>
+        <p:txBody>
+          <a:bodyPr rtlCol="0" anchor="ctr" wrap="square" lIns="731520" tIns="137160"/>
+          <a:lstStyle/>
+          <a:p>
+            <a:pPr algn="ctr">
+              <a:defRPr sz="1100" b="1">
+                <a:solidFill>
+                  <a:srgbClr val="0EA5E9"/>
+                </a:solidFill>
+              </a:defRPr>
+            </a:pPr>
+            <a:r>
+              <a:t>FINTECH CREDIT RISK &amp; RETENTION ANALYTICS</a:t>
+            </a:r>
+          </a:p>
+          <a:p>
+            <a:pPr>
+              <a:defRPr sz="2200" b="1">
+                <a:solidFill>
+                  <a:srgbClr val="FFFFFF"/>
+                </a:solidFill>
+              </a:defRPr>
+            </a:pPr>
+            <a:r>
+              <a:t>The LTV Economics Bridge &amp; Offer Catalog</a:t>
+            </a:r>
+          </a:p>
+        </p:txBody>
+      </p:sp>
+      <p:sp>
+        <p:nvSpPr>
+          <p:cNvPr id="3" name="Rounded Rectangle 2"/>
+          <p:cNvSpPr/>
+          <p:nvPr/>
+        </p:nvSpPr>
+        <p:spPr>
+          <a:xfrm>
+            <a:off x="731520" y="1280160"/>
+            <a:ext cx="5120640" cy="4937760"/>
+          </a:xfrm>
+          <a:prstGeom prst="roundRect">
+            <a:avLst/>
+          </a:prstGeom>
+          <a:solidFill>
+            <a:srgbClr val="1E293B"/>
+          </a:solidFill>
+          <a:ln>
+            <a:noFill/>
+          </a:ln>
+        </p:spPr>
+        <p:style>
+          <a:lnRef idx="1">
+            <a:schemeClr val="accent1"/>
+          </a:lnRef>
+          <a:fillRef idx="3">
+            <a:schemeClr val="accent1"/>
+          </a:fillRef>
+          <a:effectRef idx="2">
+            <a:schemeClr val="accent1"/>
+          </a:effectRef>
+          <a:fontRef idx="minor">
+            <a:schemeClr val="lt1"/>
+          </a:fontRef>
+        </p:style>
+        <p:txBody>
+          <a:bodyPr rtlCol="0" anchor="ctr" wrap="square" lIns="228600" tIns="182880" rIns="228600"/>
+          <a:lstStyle/>
+          <a:p>
+            <a:pPr algn="ctr">
+              <a:defRPr sz="1600" b="1">
+                <a:solidFill>
+                  <a:srgbClr val="FFFFFF"/>
+                </a:solidFill>
+              </a:defRPr>
+            </a:pPr>
+            <a:r>
+              <a:t>Mathematical LTV Equation</a:t>
+            </a:r>
+          </a:p>
+          <a:p>
+            <a:br/>
+            <a:pPr>
+              <a:defRPr sz="1300">
+                <a:solidFill>
+                  <a:srgbClr val="F1F5F9"/>
+                </a:solidFill>
+              </a:defRPr>
+            </a:pPr>
+            <a:r>
+              <a:t>LTV = Annual Net Margin × [ 1 / (Churn Prob + Discount Rate) ]</a:t>
+            </a:r>
+            <a:br/>
+            <a:br/>
+            <a:r>
+              <a:t>• Net Margin = (Interchange + Fees + Interest) - (Rewards + Servicing)</a:t>
+            </a:r>
+            <a:br/>
+            <a:br/>
+            <a:r>
+              <a:t>• Risk Score → Expected LTV Margin Loss → Targeted Offer Selection</a:t>
+            </a:r>
+            <a:br/>
+            <a:br/>
+            <a:r>
+              <a:t>• Prevents spending $150 offer on an account with only $80 in remaining LTV.</a:t>
             </a:r>
           </a:p>
         </p:txBody>
@@ -3406,28 +4142,32 @@
               </a:defRPr>
             </a:pPr>
             <a:r>
-              <a:t>A/B Test Experimentation Guardrails</a:t>
+              <a:t>4-Offer Retention Catalog</a:t>
             </a:r>
           </a:p>
           <a:p>
             <a:br/>
             <a:pPr>
-              <a:defRPr sz="1400">
+              <a:defRPr sz="1300">
                 <a:solidFill>
                   <a:srgbClr val="F1F5F9"/>
                 </a:solidFill>
               </a:defRPr>
             </a:pPr>
             <a:r>
-              <a:t>• Control Group (15%): No retention offer dispatched (measures baseline churn lift).</a:t>
-            </a:r>
-            <a:br/>
-            <a:r>
-              <a:t>• Treatment Group (85%): Dynamic algorithmic offer assigned.</a:t>
-            </a:r>
-            <a:br/>
-            <a:r>
-              <a:t>• 60-Day Evaluation Window: Measure actual incremental LTV saved vs predicted.</a:t>
+              <a:t>1. Annual Fee Waiver: Waives $50–$495 fee for fee-dissatisfied users.</a:t>
+            </a:r>
+            <a:br/>
+            <a:r>
+              <a:t>2. 2x Points Boost: 1.5% spend boost for active monthly spenders.</a:t>
+            </a:r>
+            <a:br/>
+            <a:r>
+              <a:t>3. 0% APR Cut / Relief: $120 interest margin discount for revolvers.</a:t>
+            </a:r>
+            <a:br/>
+            <a:r>
+              <a:t>4. VIP Perks &amp; Concierge: $150 perks for Platinum &amp; Black cardholders.</a:t>
             </a:r>
           </a:p>
         </p:txBody>
@@ -3440,7 +4180,7 @@
 </p:sld>
 </file>
 
-<file path=ppt/slides/slide11.xml><?xml version="1.0" encoding="utf-8"?>
+<file path=ppt/slides/slide6.xml><?xml version="1.0" encoding="utf-8"?>
 <p:sld xmlns:a="http://schemas.openxmlformats.org/drawingml/2006/main" xmlns:p="http://schemas.openxmlformats.org/presentationml/2006/main" xmlns:r="http://schemas.openxmlformats.org/officeDocument/2006/relationships">
   <p:cSld>
     <p:spTree>
@@ -3497,7 +4237,7 @@
               </a:defRPr>
             </a:pPr>
             <a:r>
-              <a:t>FINTECH CHURN &amp; RETENTION ROI ENGINE</a:t>
+              <a:t>FINTECH CREDIT RISK &amp; RETENTION ANALYTICS</a:t>
             </a:r>
           </a:p>
           <a:p>
@@ -3509,7 +4249,176 @@
               </a:defRPr>
             </a:pPr>
             <a:r>
-              <a:t>Summary &amp; Next Steps</a:t>
+              <a:t>ROI Simulation Engine Results (Knapsack Density Optimization)</a:t>
+            </a:r>
+          </a:p>
+        </p:txBody>
+      </p:sp>
+      <p:sp>
+        <p:nvSpPr>
+          <p:cNvPr id="3" name="Rounded Rectangle 2"/>
+          <p:cNvSpPr/>
+          <p:nvPr/>
+        </p:nvSpPr>
+        <p:spPr>
+          <a:xfrm>
+            <a:off x="731520" y="1280160"/>
+            <a:ext cx="10698480" cy="4937760"/>
+          </a:xfrm>
+          <a:prstGeom prst="roundRect">
+            <a:avLst/>
+          </a:prstGeom>
+          <a:solidFill>
+            <a:srgbClr val="1E293B"/>
+          </a:solidFill>
+          <a:ln w="19050">
+            <a:solidFill>
+              <a:srgbClr val="10B981"/>
+            </a:solidFill>
+          </a:ln>
+        </p:spPr>
+        <p:style>
+          <a:lnRef idx="1">
+            <a:schemeClr val="accent1"/>
+          </a:lnRef>
+          <a:fillRef idx="3">
+            <a:schemeClr val="accent1"/>
+          </a:fillRef>
+          <a:effectRef idx="2">
+            <a:schemeClr val="accent1"/>
+          </a:effectRef>
+          <a:fontRef idx="minor">
+            <a:schemeClr val="lt1"/>
+          </a:fontRef>
+        </p:style>
+        <p:txBody>
+          <a:bodyPr rtlCol="0" anchor="ctr" wrap="square" lIns="228600" tIns="182880" rIns="228600"/>
+          <a:lstStyle/>
+          <a:p>
+            <a:pPr algn="ctr">
+              <a:defRPr sz="1600" b="1">
+                <a:solidFill>
+                  <a:srgbClr val="FFFFFF"/>
+                </a:solidFill>
+              </a:defRPr>
+            </a:pPr>
+            <a:r>
+              <a:t>Portfolio Performance Breakdown ($500k Budget Cap)</a:t>
+            </a:r>
+          </a:p>
+          <a:p>
+            <a:br/>
+            <a:pPr>
+              <a:defRPr sz="1500">
+                <a:solidFill>
+                  <a:srgbClr val="F1F5F9"/>
+                </a:solidFill>
+              </a:defRPr>
+            </a:pPr>
+            <a:r>
+              <a:t>• Total Unmitigated At-Risk LTV Exposure:  $1.48M+</a:t>
+            </a:r>
+            <a:br/>
+            <a:r>
+              <a:t>• Total Campaign Budget Allocated:       $500,000</a:t>
+            </a:r>
+            <a:br/>
+            <a:r>
+              <a:t>• Targeted High-Risk Accounts:            3,194 / 30,000 (10.6%)</a:t>
+            </a:r>
+            <a:br/>
+            <a:r>
+              <a:t>• Gross Retained LTV Saved:               $2.91M+</a:t>
+            </a:r>
+            <a:br/>
+            <a:r>
+              <a:t>• Net Retained Profit Saved:              $2.41M+</a:t>
+            </a:r>
+            <a:br/>
+            <a:r>
+              <a:t>• Portfolio Campaign Net ROI:             483.0%</a:t>
+            </a:r>
+          </a:p>
+        </p:txBody>
+      </p:sp>
+    </p:spTree>
+  </p:cSld>
+  <p:clrMapOvr>
+    <a:masterClrMapping/>
+  </p:clrMapOvr>
+</p:sld>
+</file>
+
+<file path=ppt/slides/slide7.xml><?xml version="1.0" encoding="utf-8"?>
+<p:sld xmlns:a="http://schemas.openxmlformats.org/drawingml/2006/main" xmlns:p="http://schemas.openxmlformats.org/presentationml/2006/main" xmlns:r="http://schemas.openxmlformats.org/officeDocument/2006/relationships">
+  <p:cSld>
+    <p:spTree>
+      <p:nvGrpSpPr>
+        <p:cNvPr id="1" name=""/>
+        <p:cNvGrpSpPr/>
+        <p:nvPr/>
+      </p:nvGrpSpPr>
+      <p:grpSpPr/>
+      <p:sp>
+        <p:nvSpPr>
+          <p:cNvPr id="2" name="Rectangle 1"/>
+          <p:cNvSpPr/>
+          <p:nvPr/>
+        </p:nvSpPr>
+        <p:spPr>
+          <a:xfrm>
+            <a:off x="0" y="0"/>
+            <a:ext cx="12191695" cy="1005840"/>
+          </a:xfrm>
+          <a:prstGeom prst="rect">
+            <a:avLst/>
+          </a:prstGeom>
+          <a:solidFill>
+            <a:srgbClr val="0F172A"/>
+          </a:solidFill>
+          <a:ln>
+            <a:noFill/>
+          </a:ln>
+        </p:spPr>
+        <p:style>
+          <a:lnRef idx="1">
+            <a:schemeClr val="accent1"/>
+          </a:lnRef>
+          <a:fillRef idx="3">
+            <a:schemeClr val="accent1"/>
+          </a:fillRef>
+          <a:effectRef idx="2">
+            <a:schemeClr val="accent1"/>
+          </a:effectRef>
+          <a:fontRef idx="minor">
+            <a:schemeClr val="lt1"/>
+          </a:fontRef>
+        </p:style>
+        <p:txBody>
+          <a:bodyPr rtlCol="0" anchor="ctr" wrap="square" lIns="731520" tIns="137160"/>
+          <a:lstStyle/>
+          <a:p>
+            <a:pPr algn="ctr">
+              <a:defRPr sz="1100" b="1">
+                <a:solidFill>
+                  <a:srgbClr val="0EA5E9"/>
+                </a:solidFill>
+              </a:defRPr>
+            </a:pPr>
+            <a:r>
+              <a:t>FINTECH CREDIT RISK &amp; RETENTION ANALYTICS</a:t>
+            </a:r>
+          </a:p>
+          <a:p>
+            <a:pPr>
+              <a:defRPr sz="2200" b="1">
+                <a:solidFill>
+                  <a:srgbClr val="FFFFFF"/>
+                </a:solidFill>
+              </a:defRPr>
+            </a:pPr>
+            <a:r>
+              <a:t>Operational Next Steps &amp; Strategic Recommendations</a:t>
             </a:r>
           </a:p>
         </p:txBody>
@@ -3563,7 +4472,7 @@
               </a:defRPr>
             </a:pPr>
             <a:r>
-              <a:t>Strategic Recommendations</a:t>
+              <a:t>Action Plan for FinTech Product &amp; Growth Teams</a:t>
             </a:r>
           </a:p>
           <a:p>
@@ -3576,1697 +4485,17 @@
               </a:defRPr>
             </a:pPr>
             <a:r>
-              <a:t>1. Deploy XGBoost Churn Engine into daily batch production pipeline.</a:t>
-            </a:r>
-            <a:br/>
-            <a:br/>
-            <a:r>
-              <a:t>2. Enable Automated Retention Offer Engine for top 2 risk deciles.</a:t>
-            </a:r>
-            <a:br/>
-            <a:br/>
-            <a:r>
-              <a:t>3. Empower Customer Support agents with real-time SHAP churn triggers in support dashboard.</a:t>
-            </a:r>
-          </a:p>
-        </p:txBody>
-      </p:sp>
-    </p:spTree>
-  </p:cSld>
-  <p:clrMapOvr>
-    <a:masterClrMapping/>
-  </p:clrMapOvr>
-</p:sld>
-</file>
-
-<file path=ppt/slides/slide2.xml><?xml version="1.0" encoding="utf-8"?>
-<p:sld xmlns:a="http://schemas.openxmlformats.org/drawingml/2006/main" xmlns:p="http://schemas.openxmlformats.org/presentationml/2006/main" xmlns:r="http://schemas.openxmlformats.org/officeDocument/2006/relationships">
-  <p:cSld>
-    <p:spTree>
-      <p:nvGrpSpPr>
-        <p:cNvPr id="1" name=""/>
-        <p:cNvGrpSpPr/>
-        <p:nvPr/>
-      </p:nvGrpSpPr>
-      <p:grpSpPr/>
-      <p:sp>
-        <p:nvSpPr>
-          <p:cNvPr id="2" name="Rectangle 1"/>
-          <p:cNvSpPr/>
-          <p:nvPr/>
-        </p:nvSpPr>
-        <p:spPr>
-          <a:xfrm>
-            <a:off x="0" y="0"/>
-            <a:ext cx="12191695" cy="1005840"/>
-          </a:xfrm>
-          <a:prstGeom prst="rect">
-            <a:avLst/>
-          </a:prstGeom>
-          <a:solidFill>
-            <a:srgbClr val="0F172A"/>
-          </a:solidFill>
-          <a:ln>
-            <a:noFill/>
-          </a:ln>
-        </p:spPr>
-        <p:style>
-          <a:lnRef idx="1">
-            <a:schemeClr val="accent1"/>
-          </a:lnRef>
-          <a:fillRef idx="3">
-            <a:schemeClr val="accent1"/>
-          </a:fillRef>
-          <a:effectRef idx="2">
-            <a:schemeClr val="accent1"/>
-          </a:effectRef>
-          <a:fontRef idx="minor">
-            <a:schemeClr val="lt1"/>
-          </a:fontRef>
-        </p:style>
-        <p:txBody>
-          <a:bodyPr rtlCol="0" anchor="ctr" wrap="square" lIns="731520" tIns="137160"/>
-          <a:lstStyle/>
-          <a:p>
-            <a:pPr algn="ctr">
-              <a:defRPr sz="1100" b="1">
-                <a:solidFill>
-                  <a:srgbClr val="0EA5E9"/>
-                </a:solidFill>
-              </a:defRPr>
-            </a:pPr>
-            <a:r>
-              <a:t>FINTECH CHURN &amp; RETENTION ROI ENGINE</a:t>
-            </a:r>
-          </a:p>
-          <a:p>
-            <a:pPr>
-              <a:defRPr sz="2200" b="1">
-                <a:solidFill>
-                  <a:srgbClr val="FFFFFF"/>
-                </a:solidFill>
-              </a:defRPr>
-            </a:pPr>
-            <a:r>
-              <a:t>The Problem: Credit Card Interchange &amp; High-Value Churn Leakage</a:t>
-            </a:r>
-          </a:p>
-        </p:txBody>
-      </p:sp>
-      <p:sp>
-        <p:nvSpPr>
-          <p:cNvPr id="3" name="Rounded Rectangle 2"/>
-          <p:cNvSpPr/>
-          <p:nvPr/>
-        </p:nvSpPr>
-        <p:spPr>
-          <a:xfrm>
-            <a:off x="731520" y="1280160"/>
-            <a:ext cx="3291840" cy="4937760"/>
-          </a:xfrm>
-          <a:prstGeom prst="roundRect">
-            <a:avLst/>
-          </a:prstGeom>
-          <a:solidFill>
-            <a:srgbClr val="1E293B"/>
-          </a:solidFill>
-          <a:ln>
-            <a:noFill/>
-          </a:ln>
-        </p:spPr>
-        <p:style>
-          <a:lnRef idx="1">
-            <a:schemeClr val="accent1"/>
-          </a:lnRef>
-          <a:fillRef idx="3">
-            <a:schemeClr val="accent1"/>
-          </a:fillRef>
-          <a:effectRef idx="2">
-            <a:schemeClr val="accent1"/>
-          </a:effectRef>
-          <a:fontRef idx="minor">
-            <a:schemeClr val="lt1"/>
-          </a:fontRef>
-        </p:style>
-        <p:txBody>
-          <a:bodyPr rtlCol="0" anchor="ctr" wrap="square" lIns="228600" tIns="182880" rIns="228600"/>
-          <a:lstStyle/>
-          <a:p>
-            <a:pPr algn="ctr">
-              <a:defRPr sz="1600" b="1">
-                <a:solidFill>
-                  <a:srgbClr val="FFFFFF"/>
-                </a:solidFill>
-              </a:defRPr>
-            </a:pPr>
-            <a:r>
-              <a:t>Interchange Mechanics</a:t>
-            </a:r>
-          </a:p>
-          <a:p>
-            <a:br/>
-            <a:pPr>
-              <a:defRPr sz="1300">
-                <a:solidFill>
-                  <a:srgbClr val="F1F5F9"/>
-                </a:solidFill>
-              </a:defRPr>
-            </a:pPr>
-            <a:r>
-              <a:t>• Credit card issuers earn 1.5%–2.5% per swipe in interchange fees plus annual charges.</a:t>
-            </a:r>
-            <a:br/>
-            <a:br/>
-            <a:r>
-              <a:t>• Top 10% high-spending cardholders generate over 60% of total portfolio net margin.</a:t>
-            </a:r>
-            <a:br/>
-            <a:br/>
-            <a:r>
-              <a:t>• Acquiring a replacement cardholder costs $250–$600 (CAC).</a:t>
-            </a:r>
-          </a:p>
-        </p:txBody>
-      </p:sp>
-      <p:sp>
-        <p:nvSpPr>
-          <p:cNvPr id="4" name="Rounded Rectangle 3"/>
-          <p:cNvSpPr/>
-          <p:nvPr/>
-        </p:nvSpPr>
-        <p:spPr>
-          <a:xfrm>
-            <a:off x="4389120" y="1280160"/>
-            <a:ext cx="3291840" cy="4937760"/>
-          </a:xfrm>
-          <a:prstGeom prst="roundRect">
-            <a:avLst/>
-          </a:prstGeom>
-          <a:solidFill>
-            <a:srgbClr val="1E293B"/>
-          </a:solidFill>
-          <a:ln>
-            <a:noFill/>
-          </a:ln>
-        </p:spPr>
-        <p:style>
-          <a:lnRef idx="1">
-            <a:schemeClr val="accent1"/>
-          </a:lnRef>
-          <a:fillRef idx="3">
-            <a:schemeClr val="accent1"/>
-          </a:fillRef>
-          <a:effectRef idx="2">
-            <a:schemeClr val="accent1"/>
-          </a:effectRef>
-          <a:fontRef idx="minor">
-            <a:schemeClr val="lt1"/>
-          </a:fontRef>
-        </p:style>
-        <p:txBody>
-          <a:bodyPr rtlCol="0" anchor="ctr" wrap="square" lIns="228600" tIns="182880" rIns="228600"/>
-          <a:lstStyle/>
-          <a:p>
-            <a:pPr algn="ctr">
-              <a:defRPr sz="1600" b="1">
-                <a:solidFill>
-                  <a:srgbClr val="FFFFFF"/>
-                </a:solidFill>
-              </a:defRPr>
-            </a:pPr>
-            <a:r>
-              <a:t>The Churn Trap</a:t>
-            </a:r>
-          </a:p>
-          <a:p>
-            <a:br/>
-            <a:pPr>
-              <a:defRPr sz="1300">
-                <a:solidFill>
-                  <a:srgbClr val="F1F5F9"/>
-                </a:solidFill>
-              </a:defRPr>
-            </a:pPr>
-            <a:r>
-              <a:t>• High-spending cardholders churn silently after fee posting or support friction.</a:t>
-            </a:r>
-            <a:br/>
-            <a:br/>
-            <a:r>
-              <a:t>• Generic retention offers (e.g., blanket $50 credits) waste budget on low-risk users.</a:t>
-            </a:r>
-            <a:br/>
-            <a:br/>
-            <a:r>
-              <a:t>• Failure to tailor offers leads to negative campaign ROI and brand erosion.</a:t>
-            </a:r>
-          </a:p>
-        </p:txBody>
-      </p:sp>
-      <p:sp>
-        <p:nvSpPr>
-          <p:cNvPr id="5" name="Rounded Rectangle 4"/>
-          <p:cNvSpPr/>
-          <p:nvPr/>
-        </p:nvSpPr>
-        <p:spPr>
-          <a:xfrm>
-            <a:off x="8046720" y="1280160"/>
-            <a:ext cx="3383280" cy="4937760"/>
-          </a:xfrm>
-          <a:prstGeom prst="roundRect">
-            <a:avLst/>
-          </a:prstGeom>
-          <a:solidFill>
-            <a:srgbClr val="1E293B"/>
-          </a:solidFill>
-          <a:ln w="19050">
-            <a:solidFill>
-              <a:srgbClr val="0EA5E9"/>
-            </a:solidFill>
-          </a:ln>
-        </p:spPr>
-        <p:style>
-          <a:lnRef idx="1">
-            <a:schemeClr val="accent1"/>
-          </a:lnRef>
-          <a:fillRef idx="3">
-            <a:schemeClr val="accent1"/>
-          </a:fillRef>
-          <a:effectRef idx="2">
-            <a:schemeClr val="accent1"/>
-          </a:effectRef>
-          <a:fontRef idx="minor">
-            <a:schemeClr val="lt1"/>
-          </a:fontRef>
-        </p:style>
-        <p:txBody>
-          <a:bodyPr rtlCol="0" anchor="ctr" wrap="square" lIns="228600" tIns="182880" rIns="228600"/>
-          <a:lstStyle/>
-          <a:p>
-            <a:pPr algn="ctr">
-              <a:defRPr sz="1600" b="1">
-                <a:solidFill>
-                  <a:srgbClr val="FFFFFF"/>
-                </a:solidFill>
-              </a:defRPr>
-            </a:pPr>
-            <a:r>
-              <a:t>The Solution Blueprint</a:t>
-            </a:r>
-          </a:p>
-          <a:p>
-            <a:br/>
-            <a:pPr>
-              <a:defRPr sz="1300">
-                <a:solidFill>
-                  <a:srgbClr val="F1F5F9"/>
-                </a:solidFill>
-              </a:defRPr>
-            </a:pPr>
-            <a:r>
-              <a:t>1. ML Risk Scoring: XGBoost model identifying high-risk, high-value users.</a:t>
-            </a:r>
-            <a:br/>
-            <a:br/>
-            <a:r>
-              <a:t>2. SHAP Root Cause: Pinpointing exact friction (fees vs support vs APR).</a:t>
-            </a:r>
-            <a:br/>
-            <a:br/>
-            <a:r>
-              <a:t>3. LTV Offer Simulator: Math-driven offer allocation maximizing Net ROI.</a:t>
-            </a:r>
-          </a:p>
-        </p:txBody>
-      </p:sp>
-    </p:spTree>
-  </p:cSld>
-  <p:clrMapOvr>
-    <a:masterClrMapping/>
-  </p:clrMapOvr>
-</p:sld>
-</file>
-
-<file path=ppt/slides/slide3.xml><?xml version="1.0" encoding="utf-8"?>
-<p:sld xmlns:a="http://schemas.openxmlformats.org/drawingml/2006/main" xmlns:p="http://schemas.openxmlformats.org/presentationml/2006/main" xmlns:r="http://schemas.openxmlformats.org/officeDocument/2006/relationships">
-  <p:cSld>
-    <p:spTree>
-      <p:nvGrpSpPr>
-        <p:cNvPr id="1" name=""/>
-        <p:cNvGrpSpPr/>
-        <p:nvPr/>
-      </p:nvGrpSpPr>
-      <p:grpSpPr/>
-      <p:sp>
-        <p:nvSpPr>
-          <p:cNvPr id="2" name="Rectangle 1"/>
-          <p:cNvSpPr/>
-          <p:nvPr/>
-        </p:nvSpPr>
-        <p:spPr>
-          <a:xfrm>
-            <a:off x="0" y="0"/>
-            <a:ext cx="12191695" cy="1005840"/>
-          </a:xfrm>
-          <a:prstGeom prst="rect">
-            <a:avLst/>
-          </a:prstGeom>
-          <a:solidFill>
-            <a:srgbClr val="0F172A"/>
-          </a:solidFill>
-          <a:ln>
-            <a:noFill/>
-          </a:ln>
-        </p:spPr>
-        <p:style>
-          <a:lnRef idx="1">
-            <a:schemeClr val="accent1"/>
-          </a:lnRef>
-          <a:fillRef idx="3">
-            <a:schemeClr val="accent1"/>
-          </a:fillRef>
-          <a:effectRef idx="2">
-            <a:schemeClr val="accent1"/>
-          </a:effectRef>
-          <a:fontRef idx="minor">
-            <a:schemeClr val="lt1"/>
-          </a:fontRef>
-        </p:style>
-        <p:txBody>
-          <a:bodyPr rtlCol="0" anchor="ctr" wrap="square" lIns="731520" tIns="137160"/>
-          <a:lstStyle/>
-          <a:p>
-            <a:pPr algn="ctr">
-              <a:defRPr sz="1100" b="1">
-                <a:solidFill>
-                  <a:srgbClr val="0EA5E9"/>
-                </a:solidFill>
-              </a:defRPr>
-            </a:pPr>
-            <a:r>
-              <a:t>FINTECH CHURN &amp; RETENTION ROI ENGINE</a:t>
-            </a:r>
-          </a:p>
-          <a:p>
-            <a:pPr>
-              <a:defRPr sz="2200" b="1">
-                <a:solidFill>
-                  <a:srgbClr val="FFFFFF"/>
-                </a:solidFill>
-              </a:defRPr>
-            </a:pPr>
-            <a:r>
-              <a:t>Data Pipeline &amp; RFM Feature Engineering Architecture</a:t>
-            </a:r>
-          </a:p>
-        </p:txBody>
-      </p:sp>
-      <p:sp>
-        <p:nvSpPr>
-          <p:cNvPr id="3" name="Rounded Rectangle 2"/>
-          <p:cNvSpPr/>
-          <p:nvPr/>
-        </p:nvSpPr>
-        <p:spPr>
-          <a:xfrm>
-            <a:off x="731520" y="1280160"/>
-            <a:ext cx="5120640" cy="4937760"/>
-          </a:xfrm>
-          <a:prstGeom prst="roundRect">
-            <a:avLst/>
-          </a:prstGeom>
-          <a:solidFill>
-            <a:srgbClr val="1E293B"/>
-          </a:solidFill>
-          <a:ln>
-            <a:noFill/>
-          </a:ln>
-        </p:spPr>
-        <p:style>
-          <a:lnRef idx="1">
-            <a:schemeClr val="accent1"/>
-          </a:lnRef>
-          <a:fillRef idx="3">
-            <a:schemeClr val="accent1"/>
-          </a:fillRef>
-          <a:effectRef idx="2">
-            <a:schemeClr val="accent1"/>
-          </a:effectRef>
-          <a:fontRef idx="minor">
-            <a:schemeClr val="lt1"/>
-          </a:fontRef>
-        </p:style>
-        <p:txBody>
-          <a:bodyPr rtlCol="0" anchor="ctr" wrap="square" lIns="228600" tIns="182880" rIns="228600"/>
-          <a:lstStyle/>
-          <a:p>
-            <a:pPr algn="ctr">
-              <a:defRPr sz="1600" b="1">
-                <a:solidFill>
-                  <a:srgbClr val="FFFFFF"/>
-                </a:solidFill>
-              </a:defRPr>
-            </a:pPr>
-            <a:r>
-              <a:t>Multi-Source Data Ingestion</a:t>
-            </a:r>
-          </a:p>
-          <a:p>
-            <a:br/>
-            <a:pPr>
-              <a:defRPr sz="1300">
-                <a:solidFill>
-                  <a:srgbClr val="F1F5F9"/>
-                </a:solidFill>
-              </a:defRPr>
-            </a:pPr>
-            <a:r>
-              <a:t>• Transaction Logs: Spend velocity (3m vs 12m ratio), swipe count.</a:t>
-            </a:r>
-            <a:br/>
-            <a:r>
-              <a:t>• Support &amp; Complaints: Escalations, ticket resolution delay.</a:t>
-            </a:r>
-            <a:br/>
-            <a:r>
-              <a:t>• Credit Bureau &amp; Utilization: Balance spikes, credit limit utilization.</a:t>
-            </a:r>
-            <a:br/>
-            <a:r>
-              <a:t>• Unit Economics: Annual fees, interchange yield, reward costs.</a:t>
-            </a:r>
-          </a:p>
-        </p:txBody>
-      </p:sp>
-      <p:sp>
-        <p:nvSpPr>
-          <p:cNvPr id="4" name="Rounded Rectangle 3"/>
-          <p:cNvSpPr/>
-          <p:nvPr/>
-        </p:nvSpPr>
-        <p:spPr>
-          <a:xfrm>
-            <a:off x="6217920" y="1280160"/>
-            <a:ext cx="5212080" cy="4937760"/>
-          </a:xfrm>
-          <a:prstGeom prst="roundRect">
-            <a:avLst/>
-          </a:prstGeom>
-          <a:solidFill>
-            <a:srgbClr val="1E293B"/>
-          </a:solidFill>
-          <a:ln>
-            <a:noFill/>
-          </a:ln>
-        </p:spPr>
-        <p:style>
-          <a:lnRef idx="1">
-            <a:schemeClr val="accent1"/>
-          </a:lnRef>
-          <a:fillRef idx="3">
-            <a:schemeClr val="accent1"/>
-          </a:fillRef>
-          <a:effectRef idx="2">
-            <a:schemeClr val="accent1"/>
-          </a:effectRef>
-          <a:fontRef idx="minor">
-            <a:schemeClr val="lt1"/>
-          </a:fontRef>
-        </p:style>
-        <p:txBody>
-          <a:bodyPr rtlCol="0" anchor="ctr" wrap="square" lIns="228600" tIns="182880" rIns="228600"/>
-          <a:lstStyle/>
-          <a:p>
-            <a:pPr algn="ctr">
-              <a:defRPr sz="1600" b="1">
-                <a:solidFill>
-                  <a:srgbClr val="FFFFFF"/>
-                </a:solidFill>
-              </a:defRPr>
-            </a:pPr>
-            <a:r>
-              <a:t>RFM &amp; Behavioral Feature Engineering</a:t>
-            </a:r>
-          </a:p>
-          <a:p>
-            <a:br/>
-            <a:pPr>
-              <a:defRPr sz="1300">
-                <a:solidFill>
-                  <a:srgbClr val="F1F5F9"/>
-                </a:solidFill>
-              </a:defRPr>
-            </a:pPr>
-            <a:r>
-              <a:t>• Recency (R): Days since last transaction (1–5 decile score).</a:t>
-            </a:r>
-            <a:br/>
-            <a:r>
-              <a:t>• Frequency (F): Monthly transaction volume.</a:t>
-            </a:r>
-            <a:br/>
-            <a:r>
-              <a:t>• Monetary (M): Average monthly spend.</a:t>
-            </a:r>
-            <a:br/>
-            <a:r>
-              <a:t>• Behavioral Indicators:</a:t>
-            </a:r>
-            <a:br/>
-            <a:r>
-              <a:t>  - Utilization Risk Flag (&gt;75% balance ratio)</a:t>
-            </a:r>
-            <a:br/>
-            <a:r>
-              <a:t>  - Inactivity Trend Flag (&lt;60% spend velocity)</a:t>
-            </a:r>
-            <a:br/>
-            <a:r>
-              <a:t>  - Support Friction Score (tickets + weighted complaints)</a:t>
-            </a:r>
-          </a:p>
-        </p:txBody>
-      </p:sp>
-    </p:spTree>
-  </p:cSld>
-  <p:clrMapOvr>
-    <a:masterClrMapping/>
-  </p:clrMapOvr>
-</p:sld>
-</file>
-
-<file path=ppt/slides/slide4.xml><?xml version="1.0" encoding="utf-8"?>
-<p:sld xmlns:a="http://schemas.openxmlformats.org/drawingml/2006/main" xmlns:p="http://schemas.openxmlformats.org/presentationml/2006/main" xmlns:r="http://schemas.openxmlformats.org/officeDocument/2006/relationships">
-  <p:cSld>
-    <p:spTree>
-      <p:nvGrpSpPr>
-        <p:cNvPr id="1" name=""/>
-        <p:cNvGrpSpPr/>
-        <p:nvPr/>
-      </p:nvGrpSpPr>
-      <p:grpSpPr/>
-      <p:sp>
-        <p:nvSpPr>
-          <p:cNvPr id="2" name="Rectangle 1"/>
-          <p:cNvSpPr/>
-          <p:nvPr/>
-        </p:nvSpPr>
-        <p:spPr>
-          <a:xfrm>
-            <a:off x="0" y="0"/>
-            <a:ext cx="12191695" cy="1005840"/>
-          </a:xfrm>
-          <a:prstGeom prst="rect">
-            <a:avLst/>
-          </a:prstGeom>
-          <a:solidFill>
-            <a:srgbClr val="0F172A"/>
-          </a:solidFill>
-          <a:ln>
-            <a:noFill/>
-          </a:ln>
-        </p:spPr>
-        <p:style>
-          <a:lnRef idx="1">
-            <a:schemeClr val="accent1"/>
-          </a:lnRef>
-          <a:fillRef idx="3">
-            <a:schemeClr val="accent1"/>
-          </a:fillRef>
-          <a:effectRef idx="2">
-            <a:schemeClr val="accent1"/>
-          </a:effectRef>
-          <a:fontRef idx="minor">
-            <a:schemeClr val="lt1"/>
-          </a:fontRef>
-        </p:style>
-        <p:txBody>
-          <a:bodyPr rtlCol="0" anchor="ctr" wrap="square" lIns="731520" tIns="137160"/>
-          <a:lstStyle/>
-          <a:p>
-            <a:pPr algn="ctr">
-              <a:defRPr sz="1100" b="1">
-                <a:solidFill>
-                  <a:srgbClr val="0EA5E9"/>
-                </a:solidFill>
-              </a:defRPr>
-            </a:pPr>
-            <a:r>
-              <a:t>FINTECH CHURN &amp; RETENTION ROI ENGINE</a:t>
-            </a:r>
-          </a:p>
-          <a:p>
-            <a:pPr>
-              <a:defRPr sz="2200" b="1">
-                <a:solidFill>
-                  <a:srgbClr val="FFFFFF"/>
-                </a:solidFill>
-              </a:defRPr>
-            </a:pPr>
-            <a:r>
-              <a:t>Predictive Churn Modeling: XGBoost vs Baseline</a:t>
-            </a:r>
-          </a:p>
-        </p:txBody>
-      </p:sp>
-      <p:sp>
-        <p:nvSpPr>
-          <p:cNvPr id="3" name="Rounded Rectangle 2"/>
-          <p:cNvSpPr/>
-          <p:nvPr/>
-        </p:nvSpPr>
-        <p:spPr>
-          <a:xfrm>
-            <a:off x="731520" y="1280160"/>
-            <a:ext cx="5120640" cy="2286000"/>
-          </a:xfrm>
-          <a:prstGeom prst="roundRect">
-            <a:avLst/>
-          </a:prstGeom>
-          <a:solidFill>
-            <a:srgbClr val="1E293B"/>
-          </a:solidFill>
-          <a:ln>
-            <a:noFill/>
-          </a:ln>
-        </p:spPr>
-        <p:style>
-          <a:lnRef idx="1">
-            <a:schemeClr val="accent1"/>
-          </a:lnRef>
-          <a:fillRef idx="3">
-            <a:schemeClr val="accent1"/>
-          </a:fillRef>
-          <a:effectRef idx="2">
-            <a:schemeClr val="accent1"/>
-          </a:effectRef>
-          <a:fontRef idx="minor">
-            <a:schemeClr val="lt1"/>
-          </a:fontRef>
-        </p:style>
-        <p:txBody>
-          <a:bodyPr rtlCol="0" anchor="ctr" wrap="square" lIns="228600" tIns="182880" rIns="228600"/>
-          <a:lstStyle/>
-          <a:p>
-            <a:pPr algn="ctr">
-              <a:defRPr sz="1600" b="1">
-                <a:solidFill>
-                  <a:srgbClr val="FFFFFF"/>
-                </a:solidFill>
-              </a:defRPr>
-            </a:pPr>
-            <a:r>
-              <a:t>Model Accuracy Metrics</a:t>
-            </a:r>
-          </a:p>
-          <a:p>
-            <a:br/>
-            <a:pPr>
-              <a:defRPr sz="1300">
-                <a:solidFill>
-                  <a:srgbClr val="F1F5F9"/>
-                </a:solidFill>
-              </a:defRPr>
-            </a:pPr>
-            <a:r>
-              <a:t>• XGBoost Classifier ROC-AUC: 0.985+</a:t>
-            </a:r>
-            <a:br/>
-            <a:r>
-              <a:t>• Baseline Logistic Regression ROC-AUC: ~0.840</a:t>
-            </a:r>
-            <a:br/>
-            <a:r>
-              <a:t>• Top 20% Risk Decile Capture Rate: &gt;88% of all true churners</a:t>
-            </a:r>
-          </a:p>
-        </p:txBody>
-      </p:sp>
-      <p:sp>
-        <p:nvSpPr>
-          <p:cNvPr id="4" name="Rounded Rectangle 3"/>
-          <p:cNvSpPr/>
-          <p:nvPr/>
-        </p:nvSpPr>
-        <p:spPr>
-          <a:xfrm>
-            <a:off x="731520" y="3840480"/>
-            <a:ext cx="5120640" cy="2377440"/>
-          </a:xfrm>
-          <a:prstGeom prst="roundRect">
-            <a:avLst/>
-          </a:prstGeom>
-          <a:solidFill>
-            <a:srgbClr val="1E293B"/>
-          </a:solidFill>
-          <a:ln>
-            <a:noFill/>
-          </a:ln>
-        </p:spPr>
-        <p:style>
-          <a:lnRef idx="1">
-            <a:schemeClr val="accent1"/>
-          </a:lnRef>
-          <a:fillRef idx="3">
-            <a:schemeClr val="accent1"/>
-          </a:fillRef>
-          <a:effectRef idx="2">
-            <a:schemeClr val="accent1"/>
-          </a:effectRef>
-          <a:fontRef idx="minor">
-            <a:schemeClr val="lt1"/>
-          </a:fontRef>
-        </p:style>
-        <p:txBody>
-          <a:bodyPr rtlCol="0" anchor="ctr" wrap="square" lIns="228600" tIns="182880" rIns="228600"/>
-          <a:lstStyle/>
-          <a:p>
-            <a:pPr algn="ctr">
-              <a:defRPr sz="1600" b="1">
-                <a:solidFill>
-                  <a:srgbClr val="FFFFFF"/>
-                </a:solidFill>
-              </a:defRPr>
-            </a:pPr>
-            <a:r>
-              <a:t>Precision @ Decile Performance</a:t>
-            </a:r>
-          </a:p>
-          <a:p>
-            <a:br/>
-            <a:pPr>
-              <a:defRPr sz="1300">
-                <a:solidFill>
-                  <a:srgbClr val="F1F5F9"/>
-                </a:solidFill>
-              </a:defRPr>
-            </a:pPr>
-            <a:r>
-              <a:t>• Decile 1 (Top 10% Risk): &gt;90% Precision</a:t>
-            </a:r>
-            <a:br/>
-            <a:r>
-              <a:t>• Enables hyper-targeted retention campaigns without spamming loyal, low-risk cardholders.</a:t>
-            </a:r>
-          </a:p>
-        </p:txBody>
-      </p:sp>
-      <p:sp>
-        <p:nvSpPr>
-          <p:cNvPr id="5" name="Rounded Rectangle 4"/>
-          <p:cNvSpPr/>
-          <p:nvPr/>
-        </p:nvSpPr>
-        <p:spPr>
-          <a:xfrm>
-            <a:off x="6217920" y="1280160"/>
-            <a:ext cx="5212080" cy="4937760"/>
-          </a:xfrm>
-          <a:prstGeom prst="roundRect">
-            <a:avLst/>
-          </a:prstGeom>
-          <a:solidFill>
-            <a:srgbClr val="1E293B"/>
-          </a:solidFill>
-          <a:ln w="19050">
-            <a:solidFill>
-              <a:srgbClr val="10B981"/>
-            </a:solidFill>
-          </a:ln>
-        </p:spPr>
-        <p:style>
-          <a:lnRef idx="1">
-            <a:schemeClr val="accent1"/>
-          </a:lnRef>
-          <a:fillRef idx="3">
-            <a:schemeClr val="accent1"/>
-          </a:fillRef>
-          <a:effectRef idx="2">
-            <a:schemeClr val="accent1"/>
-          </a:effectRef>
-          <a:fontRef idx="minor">
-            <a:schemeClr val="lt1"/>
-          </a:fontRef>
-        </p:style>
-        <p:txBody>
-          <a:bodyPr rtlCol="0" anchor="ctr" wrap="square" lIns="228600" tIns="182880" rIns="228600"/>
-          <a:lstStyle/>
-          <a:p>
-            <a:pPr algn="ctr">
-              <a:defRPr sz="1600" b="1">
-                <a:solidFill>
-                  <a:srgbClr val="FFFFFF"/>
-                </a:solidFill>
-              </a:defRPr>
-            </a:pPr>
-            <a:r>
-              <a:t>Key Technical Highlights</a:t>
-            </a:r>
-          </a:p>
-          <a:p>
-            <a:br/>
-            <a:pPr>
-              <a:defRPr sz="1400">
-                <a:solidFill>
-                  <a:srgbClr val="F1F5F9"/>
-                </a:solidFill>
-              </a:defRPr>
-            </a:pPr>
-            <a:r>
-              <a:t>• Stratified K-Fold Cross Validation prevents data leakage.</a:t>
-            </a:r>
-            <a:br/>
-            <a:r>
-              <a:t>• Class Imbalance Handling ensures robust probability calibration.</a:t>
-            </a:r>
-            <a:br/>
-            <a:r>
-              <a:t>• Direct integration with SHAP TreeExplainer for instantaneous local feature attributions.</a:t>
-            </a:r>
-          </a:p>
-        </p:txBody>
-      </p:sp>
-    </p:spTree>
-  </p:cSld>
-  <p:clrMapOvr>
-    <a:masterClrMapping/>
-  </p:clrMapOvr>
-</p:sld>
-</file>
-
-<file path=ppt/slides/slide5.xml><?xml version="1.0" encoding="utf-8"?>
-<p:sld xmlns:a="http://schemas.openxmlformats.org/drawingml/2006/main" xmlns:p="http://schemas.openxmlformats.org/presentationml/2006/main" xmlns:r="http://schemas.openxmlformats.org/officeDocument/2006/relationships">
-  <p:cSld>
-    <p:spTree>
-      <p:nvGrpSpPr>
-        <p:cNvPr id="1" name=""/>
-        <p:cNvGrpSpPr/>
-        <p:nvPr/>
-      </p:nvGrpSpPr>
-      <p:grpSpPr/>
-      <p:sp>
-        <p:nvSpPr>
-          <p:cNvPr id="2" name="Rectangle 1"/>
-          <p:cNvSpPr/>
-          <p:nvPr/>
-        </p:nvSpPr>
-        <p:spPr>
-          <a:xfrm>
-            <a:off x="0" y="0"/>
-            <a:ext cx="12191695" cy="1005840"/>
-          </a:xfrm>
-          <a:prstGeom prst="rect">
-            <a:avLst/>
-          </a:prstGeom>
-          <a:solidFill>
-            <a:srgbClr val="0F172A"/>
-          </a:solidFill>
-          <a:ln>
-            <a:noFill/>
-          </a:ln>
-        </p:spPr>
-        <p:style>
-          <a:lnRef idx="1">
-            <a:schemeClr val="accent1"/>
-          </a:lnRef>
-          <a:fillRef idx="3">
-            <a:schemeClr val="accent1"/>
-          </a:fillRef>
-          <a:effectRef idx="2">
-            <a:schemeClr val="accent1"/>
-          </a:effectRef>
-          <a:fontRef idx="minor">
-            <a:schemeClr val="lt1"/>
-          </a:fontRef>
-        </p:style>
-        <p:txBody>
-          <a:bodyPr rtlCol="0" anchor="ctr" wrap="square" lIns="731520" tIns="137160"/>
-          <a:lstStyle/>
-          <a:p>
-            <a:pPr algn="ctr">
-              <a:defRPr sz="1100" b="1">
-                <a:solidFill>
-                  <a:srgbClr val="0EA5E9"/>
-                </a:solidFill>
-              </a:defRPr>
-            </a:pPr>
-            <a:r>
-              <a:t>FINTECH CHURN &amp; RETENTION ROI ENGINE</a:t>
-            </a:r>
-          </a:p>
-          <a:p>
-            <a:pPr>
-              <a:defRPr sz="2200" b="1">
-                <a:solidFill>
-                  <a:srgbClr val="FFFFFF"/>
-                </a:solidFill>
-              </a:defRPr>
-            </a:pPr>
-            <a:r>
-              <a:t>SHAP Interpretability: Pinpointing Top Churn Triggers</a:t>
-            </a:r>
-          </a:p>
-        </p:txBody>
-      </p:sp>
-      <p:sp>
-        <p:nvSpPr>
-          <p:cNvPr id="3" name="Rounded Rectangle 2"/>
-          <p:cNvSpPr/>
-          <p:nvPr/>
-        </p:nvSpPr>
-        <p:spPr>
-          <a:xfrm>
-            <a:off x="731520" y="1280160"/>
-            <a:ext cx="3291840" cy="4937760"/>
-          </a:xfrm>
-          <a:prstGeom prst="roundRect">
-            <a:avLst/>
-          </a:prstGeom>
-          <a:solidFill>
-            <a:srgbClr val="1E293B"/>
-          </a:solidFill>
-          <a:ln>
-            <a:noFill/>
-          </a:ln>
-        </p:spPr>
-        <p:style>
-          <a:lnRef idx="1">
-            <a:schemeClr val="accent1"/>
-          </a:lnRef>
-          <a:fillRef idx="3">
-            <a:schemeClr val="accent1"/>
-          </a:fillRef>
-          <a:effectRef idx="2">
-            <a:schemeClr val="accent1"/>
-          </a:effectRef>
-          <a:fontRef idx="minor">
-            <a:schemeClr val="lt1"/>
-          </a:fontRef>
-        </p:style>
-        <p:txBody>
-          <a:bodyPr rtlCol="0" anchor="ctr" wrap="square" lIns="228600" tIns="182880" rIns="228600"/>
-          <a:lstStyle/>
-          <a:p>
-            <a:pPr algn="ctr">
-              <a:defRPr sz="1600" b="1">
-                <a:solidFill>
-                  <a:srgbClr val="FFFFFF"/>
-                </a:solidFill>
-              </a:defRPr>
-            </a:pPr>
-            <a:r>
-              <a:t>Trigger 1: Inactivity &amp; Recency</a:t>
-            </a:r>
-          </a:p>
-          <a:p>
-            <a:br/>
-            <a:pPr>
-              <a:defRPr sz="1300">
-                <a:solidFill>
-                  <a:srgbClr val="F1F5F9"/>
-                </a:solidFill>
-              </a:defRPr>
-            </a:pPr>
-            <a:r>
-              <a:t>• Days since last transaction and spend velocity drop (&lt;0.6x) are primary signals of engagement loss.</a:t>
-            </a:r>
-            <a:br/>
-            <a:r>
-              <a:t>• Action: Automated points boost offer.</a:t>
-            </a:r>
-          </a:p>
-        </p:txBody>
-      </p:sp>
-      <p:sp>
-        <p:nvSpPr>
-          <p:cNvPr id="4" name="Rounded Rectangle 3"/>
-          <p:cNvSpPr/>
-          <p:nvPr/>
-        </p:nvSpPr>
-        <p:spPr>
-          <a:xfrm>
-            <a:off x="4389120" y="1280160"/>
-            <a:ext cx="3291840" cy="4937760"/>
-          </a:xfrm>
-          <a:prstGeom prst="roundRect">
-            <a:avLst/>
-          </a:prstGeom>
-          <a:solidFill>
-            <a:srgbClr val="1E293B"/>
-          </a:solidFill>
-          <a:ln>
-            <a:noFill/>
-          </a:ln>
-        </p:spPr>
-        <p:style>
-          <a:lnRef idx="1">
-            <a:schemeClr val="accent1"/>
-          </a:lnRef>
-          <a:fillRef idx="3">
-            <a:schemeClr val="accent1"/>
-          </a:fillRef>
-          <a:effectRef idx="2">
-            <a:schemeClr val="accent1"/>
-          </a:effectRef>
-          <a:fontRef idx="minor">
-            <a:schemeClr val="lt1"/>
-          </a:fontRef>
-        </p:style>
-        <p:txBody>
-          <a:bodyPr rtlCol="0" anchor="ctr" wrap="square" lIns="228600" tIns="182880" rIns="228600"/>
-          <a:lstStyle/>
-          <a:p>
-            <a:pPr algn="ctr">
-              <a:defRPr sz="1600" b="1">
-                <a:solidFill>
-                  <a:srgbClr val="FFFFFF"/>
-                </a:solidFill>
-              </a:defRPr>
-            </a:pPr>
-            <a:r>
-              <a:t>Trigger 2: Fee vs Spend Friction</a:t>
-            </a:r>
-          </a:p>
-          <a:p>
-            <a:br/>
-            <a:pPr>
-              <a:defRPr sz="1300">
-                <a:solidFill>
-                  <a:srgbClr val="F1F5F9"/>
-                </a:solidFill>
-              </a:defRPr>
-            </a:pPr>
-            <a:r>
-              <a:t>• High annual fees ($95–$495) on accounts with dropping spend create strong fee dissatisfaction.</a:t>
-            </a:r>
-            <a:br/>
-            <a:r>
-              <a:t>• Action: Annual Fee Waiver offer.</a:t>
-            </a:r>
-          </a:p>
-        </p:txBody>
-      </p:sp>
-      <p:sp>
-        <p:nvSpPr>
-          <p:cNvPr id="5" name="Rounded Rectangle 4"/>
-          <p:cNvSpPr/>
-          <p:nvPr/>
-        </p:nvSpPr>
-        <p:spPr>
-          <a:xfrm>
-            <a:off x="8046720" y="1280160"/>
-            <a:ext cx="3383280" cy="4937760"/>
-          </a:xfrm>
-          <a:prstGeom prst="roundRect">
-            <a:avLst/>
-          </a:prstGeom>
-          <a:solidFill>
-            <a:srgbClr val="1E293B"/>
-          </a:solidFill>
-          <a:ln>
-            <a:noFill/>
-          </a:ln>
-        </p:spPr>
-        <p:style>
-          <a:lnRef idx="1">
-            <a:schemeClr val="accent1"/>
-          </a:lnRef>
-          <a:fillRef idx="3">
-            <a:schemeClr val="accent1"/>
-          </a:fillRef>
-          <a:effectRef idx="2">
-            <a:schemeClr val="accent1"/>
-          </a:effectRef>
-          <a:fontRef idx="minor">
-            <a:schemeClr val="lt1"/>
-          </a:fontRef>
-        </p:style>
-        <p:txBody>
-          <a:bodyPr rtlCol="0" anchor="ctr" wrap="square" lIns="228600" tIns="182880" rIns="228600"/>
-          <a:lstStyle/>
-          <a:p>
-            <a:pPr algn="ctr">
-              <a:defRPr sz="1600" b="1">
-                <a:solidFill>
-                  <a:srgbClr val="FFFFFF"/>
-                </a:solidFill>
-              </a:defRPr>
-            </a:pPr>
-            <a:r>
-              <a:t>Trigger 3: Support Friction</a:t>
-            </a:r>
-          </a:p>
-          <a:p>
-            <a:br/>
-            <a:pPr>
-              <a:defRPr sz="1300">
-                <a:solidFill>
-                  <a:srgbClr val="F1F5F9"/>
-                </a:solidFill>
-              </a:defRPr>
-            </a:pPr>
-            <a:r>
-              <a:t>• Unresolved complaint tickets &amp; high support calls trigger immediate competitor balance transfers.</a:t>
-            </a:r>
-            <a:br/>
-            <a:r>
-              <a:t>• Action: Priority VIP concierge routing.</a:t>
-            </a:r>
-          </a:p>
-        </p:txBody>
-      </p:sp>
-    </p:spTree>
-  </p:cSld>
-  <p:clrMapOvr>
-    <a:masterClrMapping/>
-  </p:clrMapOvr>
-</p:sld>
-</file>
-
-<file path=ppt/slides/slide6.xml><?xml version="1.0" encoding="utf-8"?>
-<p:sld xmlns:a="http://schemas.openxmlformats.org/drawingml/2006/main" xmlns:p="http://schemas.openxmlformats.org/presentationml/2006/main" xmlns:r="http://schemas.openxmlformats.org/officeDocument/2006/relationships">
-  <p:cSld>
-    <p:spTree>
-      <p:nvGrpSpPr>
-        <p:cNvPr id="1" name=""/>
-        <p:cNvGrpSpPr/>
-        <p:nvPr/>
-      </p:nvGrpSpPr>
-      <p:grpSpPr/>
-      <p:sp>
-        <p:nvSpPr>
-          <p:cNvPr id="2" name="Rectangle 1"/>
-          <p:cNvSpPr/>
-          <p:nvPr/>
-        </p:nvSpPr>
-        <p:spPr>
-          <a:xfrm>
-            <a:off x="0" y="0"/>
-            <a:ext cx="12191695" cy="1005840"/>
-          </a:xfrm>
-          <a:prstGeom prst="rect">
-            <a:avLst/>
-          </a:prstGeom>
-          <a:solidFill>
-            <a:srgbClr val="0F172A"/>
-          </a:solidFill>
-          <a:ln>
-            <a:noFill/>
-          </a:ln>
-        </p:spPr>
-        <p:style>
-          <a:lnRef idx="1">
-            <a:schemeClr val="accent1"/>
-          </a:lnRef>
-          <a:fillRef idx="3">
-            <a:schemeClr val="accent1"/>
-          </a:fillRef>
-          <a:effectRef idx="2">
-            <a:schemeClr val="accent1"/>
-          </a:effectRef>
-          <a:fontRef idx="minor">
-            <a:schemeClr val="lt1"/>
-          </a:fontRef>
-        </p:style>
-        <p:txBody>
-          <a:bodyPr rtlCol="0" anchor="ctr" wrap="square" lIns="731520" tIns="137160"/>
-          <a:lstStyle/>
-          <a:p>
-            <a:pPr algn="ctr">
-              <a:defRPr sz="1100" b="1">
-                <a:solidFill>
-                  <a:srgbClr val="0EA5E9"/>
-                </a:solidFill>
-              </a:defRPr>
-            </a:pPr>
-            <a:r>
-              <a:t>FINTECH CHURN &amp; RETENTION ROI ENGINE</a:t>
-            </a:r>
-          </a:p>
-          <a:p>
-            <a:pPr>
-              <a:defRPr sz="2200" b="1">
-                <a:solidFill>
-                  <a:srgbClr val="FFFFFF"/>
-                </a:solidFill>
-              </a:defRPr>
-            </a:pPr>
-            <a:r>
-              <a:t>Unit Economics &amp; Customer Lifetime Value (LTV) Framework</a:t>
-            </a:r>
-          </a:p>
-        </p:txBody>
-      </p:sp>
-      <p:sp>
-        <p:nvSpPr>
-          <p:cNvPr id="3" name="Rounded Rectangle 2"/>
-          <p:cNvSpPr/>
-          <p:nvPr/>
-        </p:nvSpPr>
-        <p:spPr>
-          <a:xfrm>
-            <a:off x="731520" y="1280160"/>
-            <a:ext cx="10698480" cy="4937760"/>
-          </a:xfrm>
-          <a:prstGeom prst="roundRect">
-            <a:avLst/>
-          </a:prstGeom>
-          <a:solidFill>
-            <a:srgbClr val="1E293B"/>
-          </a:solidFill>
-          <a:ln>
-            <a:noFill/>
-          </a:ln>
-        </p:spPr>
-        <p:style>
-          <a:lnRef idx="1">
-            <a:schemeClr val="accent1"/>
-          </a:lnRef>
-          <a:fillRef idx="3">
-            <a:schemeClr val="accent1"/>
-          </a:fillRef>
-          <a:effectRef idx="2">
-            <a:schemeClr val="accent1"/>
-          </a:effectRef>
-          <a:fontRef idx="minor">
-            <a:schemeClr val="lt1"/>
-          </a:fontRef>
-        </p:style>
-        <p:txBody>
-          <a:bodyPr rtlCol="0" anchor="ctr" wrap="square" lIns="228600" tIns="182880" rIns="228600"/>
-          <a:lstStyle/>
-          <a:p>
-            <a:pPr algn="ctr">
-              <a:defRPr sz="1600" b="1">
-                <a:solidFill>
-                  <a:srgbClr val="FFFFFF"/>
-                </a:solidFill>
-              </a:defRPr>
-            </a:pPr>
-            <a:r>
-              <a:t>Mathematical LTV &amp; Net Margin Formulation</a:t>
-            </a:r>
-          </a:p>
-          <a:p>
-            <a:br/>
-            <a:pPr>
-              <a:defRPr sz="1400">
-                <a:solidFill>
-                  <a:srgbClr val="F1F5F9"/>
-                </a:solidFill>
-              </a:defRPr>
-            </a:pPr>
-            <a:r>
-              <a:t>Annual Net Margin = (Interchange Rev + Annual Fee + Interest Paid) - (Reward Cost + Servicing Cost)</a:t>
-            </a:r>
-            <a:br/>
-            <a:br/>
-            <a:r>
-              <a:t>Customer Lifetime Value (LTV) = Annual Net Margin × [ 1 / (Churn Probability + Discount Rate) ]</a:t>
-            </a:r>
-            <a:br/>
-            <a:br/>
-            <a:r>
-              <a:t>• Standard Tier LTV: ~$450 | Gold Tier LTV: ~$1,200 | Platinum LTV: ~$3,400 | Black Tier LTV: ~$8,900+</a:t>
-            </a:r>
-            <a:br/>
-            <a:r>
-              <a:t>• Demonstrates why losing a single Black/Platinum cardholder destroys thousands in future profit.</a:t>
-            </a:r>
-          </a:p>
-        </p:txBody>
-      </p:sp>
-    </p:spTree>
-  </p:cSld>
-  <p:clrMapOvr>
-    <a:masterClrMapping/>
-  </p:clrMapOvr>
-</p:sld>
-</file>
-
-<file path=ppt/slides/slide7.xml><?xml version="1.0" encoding="utf-8"?>
-<p:sld xmlns:a="http://schemas.openxmlformats.org/drawingml/2006/main" xmlns:p="http://schemas.openxmlformats.org/presentationml/2006/main" xmlns:r="http://schemas.openxmlformats.org/officeDocument/2006/relationships">
-  <p:cSld>
-    <p:spTree>
-      <p:nvGrpSpPr>
-        <p:cNvPr id="1" name=""/>
-        <p:cNvGrpSpPr/>
-        <p:nvPr/>
-      </p:nvGrpSpPr>
-      <p:grpSpPr/>
-      <p:sp>
-        <p:nvSpPr>
-          <p:cNvPr id="2" name="Rectangle 1"/>
-          <p:cNvSpPr/>
-          <p:nvPr/>
-        </p:nvSpPr>
-        <p:spPr>
-          <a:xfrm>
-            <a:off x="0" y="0"/>
-            <a:ext cx="12191695" cy="1005840"/>
-          </a:xfrm>
-          <a:prstGeom prst="rect">
-            <a:avLst/>
-          </a:prstGeom>
-          <a:solidFill>
-            <a:srgbClr val="0F172A"/>
-          </a:solidFill>
-          <a:ln>
-            <a:noFill/>
-          </a:ln>
-        </p:spPr>
-        <p:style>
-          <a:lnRef idx="1">
-            <a:schemeClr val="accent1"/>
-          </a:lnRef>
-          <a:fillRef idx="3">
-            <a:schemeClr val="accent1"/>
-          </a:fillRef>
-          <a:effectRef idx="2">
-            <a:schemeClr val="accent1"/>
-          </a:effectRef>
-          <a:fontRef idx="minor">
-            <a:schemeClr val="lt1"/>
-          </a:fontRef>
-        </p:style>
-        <p:txBody>
-          <a:bodyPr rtlCol="0" anchor="ctr" wrap="square" lIns="731520" tIns="137160"/>
-          <a:lstStyle/>
-          <a:p>
-            <a:pPr algn="ctr">
-              <a:defRPr sz="1100" b="1">
-                <a:solidFill>
-                  <a:srgbClr val="0EA5E9"/>
-                </a:solidFill>
-              </a:defRPr>
-            </a:pPr>
-            <a:r>
-              <a:t>FINTECH CHURN &amp; RETENTION ROI ENGINE</a:t>
-            </a:r>
-          </a:p>
-          <a:p>
-            <a:pPr>
-              <a:defRPr sz="2200" b="1">
-                <a:solidFill>
-                  <a:srgbClr val="FFFFFF"/>
-                </a:solidFill>
-              </a:defRPr>
-            </a:pPr>
-            <a:r>
-              <a:t>Retention Offer Matrix &amp; Targeted Effectiveness</a:t>
-            </a:r>
-          </a:p>
-        </p:txBody>
-      </p:sp>
-      <p:sp>
-        <p:nvSpPr>
-          <p:cNvPr id="3" name="Rounded Rectangle 2"/>
-          <p:cNvSpPr/>
-          <p:nvPr/>
-        </p:nvSpPr>
-        <p:spPr>
-          <a:xfrm>
-            <a:off x="731520" y="1280160"/>
-            <a:ext cx="2468880" cy="4937760"/>
-          </a:xfrm>
-          <a:prstGeom prst="roundRect">
-            <a:avLst/>
-          </a:prstGeom>
-          <a:solidFill>
-            <a:srgbClr val="1E293B"/>
-          </a:solidFill>
-          <a:ln>
-            <a:noFill/>
-          </a:ln>
-        </p:spPr>
-        <p:style>
-          <a:lnRef idx="1">
-            <a:schemeClr val="accent1"/>
-          </a:lnRef>
-          <a:fillRef idx="3">
-            <a:schemeClr val="accent1"/>
-          </a:fillRef>
-          <a:effectRef idx="2">
-            <a:schemeClr val="accent1"/>
-          </a:effectRef>
-          <a:fontRef idx="minor">
-            <a:schemeClr val="lt1"/>
-          </a:fontRef>
-        </p:style>
-        <p:txBody>
-          <a:bodyPr rtlCol="0" anchor="ctr" wrap="square" lIns="228600" tIns="182880" rIns="228600"/>
-          <a:lstStyle/>
-          <a:p>
-            <a:pPr algn="ctr">
-              <a:defRPr sz="1600" b="1">
-                <a:solidFill>
-                  <a:srgbClr val="FFFFFF"/>
-                </a:solidFill>
-              </a:defRPr>
-            </a:pPr>
-            <a:r>
-              <a:t>1. Fee Waiver</a:t>
-            </a:r>
-          </a:p>
-          <a:p>
-            <a:br/>
-            <a:pPr>
-              <a:defRPr sz="1300">
-                <a:solidFill>
-                  <a:srgbClr val="F1F5F9"/>
-                </a:solidFill>
-              </a:defRPr>
-            </a:pPr>
-            <a:r>
-              <a:t>• Cost: $95–$495</a:t>
-            </a:r>
-            <a:br/>
-            <a:r>
-              <a:t>• Target: Fee-friction users</a:t>
-            </a:r>
-            <a:br/>
-            <a:r>
-              <a:t>• Churn Reduction: Up to 45%</a:t>
-            </a:r>
-          </a:p>
-        </p:txBody>
-      </p:sp>
-      <p:sp>
-        <p:nvSpPr>
-          <p:cNvPr id="4" name="Rounded Rectangle 3"/>
-          <p:cNvSpPr/>
-          <p:nvPr/>
-        </p:nvSpPr>
-        <p:spPr>
-          <a:xfrm>
-            <a:off x="3474720" y="1280160"/>
-            <a:ext cx="2468880" cy="4937760"/>
-          </a:xfrm>
-          <a:prstGeom prst="roundRect">
-            <a:avLst/>
-          </a:prstGeom>
-          <a:solidFill>
-            <a:srgbClr val="1E293B"/>
-          </a:solidFill>
-          <a:ln>
-            <a:noFill/>
-          </a:ln>
-        </p:spPr>
-        <p:style>
-          <a:lnRef idx="1">
-            <a:schemeClr val="accent1"/>
-          </a:lnRef>
-          <a:fillRef idx="3">
-            <a:schemeClr val="accent1"/>
-          </a:fillRef>
-          <a:effectRef idx="2">
-            <a:schemeClr val="accent1"/>
-          </a:effectRef>
-          <a:fontRef idx="minor">
-            <a:schemeClr val="lt1"/>
-          </a:fontRef>
-        </p:style>
-        <p:txBody>
-          <a:bodyPr rtlCol="0" anchor="ctr" wrap="square" lIns="228600" tIns="182880" rIns="228600"/>
-          <a:lstStyle/>
-          <a:p>
-            <a:pPr algn="ctr">
-              <a:defRPr sz="1600" b="1">
-                <a:solidFill>
-                  <a:srgbClr val="FFFFFF"/>
-                </a:solidFill>
-              </a:defRPr>
-            </a:pPr>
-            <a:r>
-              <a:t>2. 2x Points Boost</a:t>
-            </a:r>
-          </a:p>
-          <a:p>
-            <a:br/>
-            <a:pPr>
-              <a:defRPr sz="1300">
-                <a:solidFill>
-                  <a:srgbClr val="F1F5F9"/>
-                </a:solidFill>
-              </a:defRPr>
-            </a:pPr>
-            <a:r>
-              <a:t>• Cost: 1.5% of spend</a:t>
-            </a:r>
-            <a:br/>
-            <a:r>
-              <a:t>• Target: High monthly spenders</a:t>
-            </a:r>
-            <a:br/>
-            <a:r>
-              <a:t>• Churn Reduction: Up to 38%</a:t>
-            </a:r>
-          </a:p>
-        </p:txBody>
-      </p:sp>
-      <p:sp>
-        <p:nvSpPr>
-          <p:cNvPr id="5" name="Rounded Rectangle 4"/>
-          <p:cNvSpPr/>
-          <p:nvPr/>
-        </p:nvSpPr>
-        <p:spPr>
-          <a:xfrm>
-            <a:off x="6217920" y="1280160"/>
-            <a:ext cx="2468880" cy="4937760"/>
-          </a:xfrm>
-          <a:prstGeom prst="roundRect">
-            <a:avLst/>
-          </a:prstGeom>
-          <a:solidFill>
-            <a:srgbClr val="1E293B"/>
-          </a:solidFill>
-          <a:ln>
-            <a:noFill/>
-          </a:ln>
-        </p:spPr>
-        <p:style>
-          <a:lnRef idx="1">
-            <a:schemeClr val="accent1"/>
-          </a:lnRef>
-          <a:fillRef idx="3">
-            <a:schemeClr val="accent1"/>
-          </a:fillRef>
-          <a:effectRef idx="2">
-            <a:schemeClr val="accent1"/>
-          </a:effectRef>
-          <a:fontRef idx="minor">
-            <a:schemeClr val="lt1"/>
-          </a:fontRef>
-        </p:style>
-        <p:txBody>
-          <a:bodyPr rtlCol="0" anchor="ctr" wrap="square" lIns="228600" tIns="182880" rIns="228600"/>
-          <a:lstStyle/>
-          <a:p>
-            <a:pPr algn="ctr">
-              <a:defRPr sz="1600" b="1">
-                <a:solidFill>
-                  <a:srgbClr val="FFFFFF"/>
-                </a:solidFill>
-              </a:defRPr>
-            </a:pPr>
-            <a:r>
-              <a:t>3. APR Discount</a:t>
-            </a:r>
-          </a:p>
-          <a:p>
-            <a:br/>
-            <a:pPr>
-              <a:defRPr sz="1300">
-                <a:solidFill>
-                  <a:srgbClr val="F1F5F9"/>
-                </a:solidFill>
-              </a:defRPr>
-            </a:pPr>
-            <a:r>
-              <a:t>• Cost: $120 margin</a:t>
-            </a:r>
-            <a:br/>
-            <a:r>
-              <a:t>• Target: Revolving balance users</a:t>
-            </a:r>
-            <a:br/>
-            <a:r>
-              <a:t>• Churn Reduction: Up to 42%</a:t>
-            </a:r>
-          </a:p>
-        </p:txBody>
-      </p:sp>
-      <p:sp>
-        <p:nvSpPr>
-          <p:cNvPr id="6" name="Rounded Rectangle 5"/>
-          <p:cNvSpPr/>
-          <p:nvPr/>
-        </p:nvSpPr>
-        <p:spPr>
-          <a:xfrm>
-            <a:off x="8961120" y="1280160"/>
-            <a:ext cx="2468880" cy="4937760"/>
-          </a:xfrm>
-          <a:prstGeom prst="roundRect">
-            <a:avLst/>
-          </a:prstGeom>
-          <a:solidFill>
-            <a:srgbClr val="1E293B"/>
-          </a:solidFill>
-          <a:ln>
-            <a:noFill/>
-          </a:ln>
-        </p:spPr>
-        <p:style>
-          <a:lnRef idx="1">
-            <a:schemeClr val="accent1"/>
-          </a:lnRef>
-          <a:fillRef idx="3">
-            <a:schemeClr val="accent1"/>
-          </a:fillRef>
-          <a:effectRef idx="2">
-            <a:schemeClr val="accent1"/>
-          </a:effectRef>
-          <a:fontRef idx="minor">
-            <a:schemeClr val="lt1"/>
-          </a:fontRef>
-        </p:style>
-        <p:txBody>
-          <a:bodyPr rtlCol="0" anchor="ctr" wrap="square" lIns="228600" tIns="182880" rIns="228600"/>
-          <a:lstStyle/>
-          <a:p>
-            <a:pPr algn="ctr">
-              <a:defRPr sz="1600" b="1">
-                <a:solidFill>
-                  <a:srgbClr val="FFFFFF"/>
-                </a:solidFill>
-              </a:defRPr>
-            </a:pPr>
-            <a:r>
-              <a:t>4. VIP Perks</a:t>
-            </a:r>
-          </a:p>
-          <a:p>
-            <a:br/>
-            <a:pPr>
-              <a:defRPr sz="1300">
-                <a:solidFill>
-                  <a:srgbClr val="F1F5F9"/>
-                </a:solidFill>
-              </a:defRPr>
-            </a:pPr>
-            <a:r>
-              <a:t>• Cost: $150 fixed</a:t>
-            </a:r>
-            <a:br/>
-            <a:r>
-              <a:t>• Target: Platinum / Black tier</a:t>
-            </a:r>
-            <a:br/>
-            <a:r>
-              <a:t>• Churn Reduction: Up to 35%</a:t>
+              <a:t>1. Pilot Top-Decile Campaign: Roll out automated offer dispatches to top 2 risk deciles.</a:t>
+            </a:r>
+            <a:br/>
+            <a:br/>
+            <a:r>
+              <a:t>2. Replace Simulated Multipliers with Causal A/B Testing: Calibration of treatment effect assumptions against live production experimental data.</a:t>
+            </a:r>
+            <a:br/>
+            <a:br/>
+            <a:r>
+              <a:t>3. Extend Model to True Attrition Data: Connect credit default signals to account-closure events when attrition logs become available.</a:t>
             </a:r>
           </a:p>
         </p:txBody>
@@ -5336,7 +4565,7 @@
               </a:defRPr>
             </a:pPr>
             <a:r>
-              <a:t>FINTECH CHURN &amp; RETENTION ROI ENGINE</a:t>
+              <a:t>FINTECH CREDIT RISK &amp; RETENTION ANALYTICS</a:t>
             </a:r>
           </a:p>
           <a:p>
@@ -5348,241 +4577,7 @@
               </a:defRPr>
             </a:pPr>
             <a:r>
-              <a:t>ROI Simulation Engine: Campaign Financial Impact</a:t>
-            </a:r>
-          </a:p>
-        </p:txBody>
-      </p:sp>
-      <p:sp>
-        <p:nvSpPr>
-          <p:cNvPr id="3" name="Rounded Rectangle 2"/>
-          <p:cNvSpPr/>
-          <p:nvPr/>
-        </p:nvSpPr>
-        <p:spPr>
-          <a:xfrm>
-            <a:off x="731520" y="1280160"/>
-            <a:ext cx="5120640" cy="4937760"/>
-          </a:xfrm>
-          <a:prstGeom prst="roundRect">
-            <a:avLst/>
-          </a:prstGeom>
-          <a:solidFill>
-            <a:srgbClr val="1E293B"/>
-          </a:solidFill>
-          <a:ln w="19050">
-            <a:solidFill>
-              <a:srgbClr val="10B981"/>
-            </a:solidFill>
-          </a:ln>
-        </p:spPr>
-        <p:style>
-          <a:lnRef idx="1">
-            <a:schemeClr val="accent1"/>
-          </a:lnRef>
-          <a:fillRef idx="3">
-            <a:schemeClr val="accent1"/>
-          </a:fillRef>
-          <a:effectRef idx="2">
-            <a:schemeClr val="accent1"/>
-          </a:effectRef>
-          <a:fontRef idx="minor">
-            <a:schemeClr val="lt1"/>
-          </a:fontRef>
-        </p:style>
-        <p:txBody>
-          <a:bodyPr rtlCol="0" anchor="ctr" wrap="square" lIns="228600" tIns="182880" rIns="228600"/>
-          <a:lstStyle/>
-          <a:p>
-            <a:pPr algn="ctr">
-              <a:defRPr sz="1600" b="1">
-                <a:solidFill>
-                  <a:srgbClr val="FFFFFF"/>
-                </a:solidFill>
-              </a:defRPr>
-            </a:pPr>
-            <a:r>
-              <a:t>Portfolio Financial Results</a:t>
-            </a:r>
-          </a:p>
-          <a:p>
-            <a:br/>
-            <a:pPr>
-              <a:defRPr sz="1400">
-                <a:solidFill>
-                  <a:srgbClr val="F1F5F9"/>
-                </a:solidFill>
-              </a:defRPr>
-            </a:pPr>
-            <a:r>
-              <a:t>• Total At-Risk LTV (Unmitigated): $2.4M+</a:t>
-            </a:r>
-            <a:br/>
-            <a:r>
-              <a:t>• Optimized Campaign Budget: $250,000</a:t>
-            </a:r>
-            <a:br/>
-            <a:r>
-              <a:t>• Gross Retained LTV Saved: $1.15M+</a:t>
-            </a:r>
-            <a:br/>
-            <a:r>
-              <a:t>• Net Retained Profit Saved: $900,000+</a:t>
-            </a:r>
-            <a:br/>
-            <a:r>
-              <a:t>• Campaign Net ROI: 360%–450%</a:t>
-            </a:r>
-          </a:p>
-        </p:txBody>
-      </p:sp>
-      <p:sp>
-        <p:nvSpPr>
-          <p:cNvPr id="4" name="Rounded Rectangle 3"/>
-          <p:cNvSpPr/>
-          <p:nvPr/>
-        </p:nvSpPr>
-        <p:spPr>
-          <a:xfrm>
-            <a:off x="6217920" y="1280160"/>
-            <a:ext cx="5212080" cy="4937760"/>
-          </a:xfrm>
-          <a:prstGeom prst="roundRect">
-            <a:avLst/>
-          </a:prstGeom>
-          <a:solidFill>
-            <a:srgbClr val="1E293B"/>
-          </a:solidFill>
-          <a:ln>
-            <a:noFill/>
-          </a:ln>
-        </p:spPr>
-        <p:style>
-          <a:lnRef idx="1">
-            <a:schemeClr val="accent1"/>
-          </a:lnRef>
-          <a:fillRef idx="3">
-            <a:schemeClr val="accent1"/>
-          </a:fillRef>
-          <a:effectRef idx="2">
-            <a:schemeClr val="accent1"/>
-          </a:effectRef>
-          <a:fontRef idx="minor">
-            <a:schemeClr val="lt1"/>
-          </a:fontRef>
-        </p:style>
-        <p:txBody>
-          <a:bodyPr rtlCol="0" anchor="ctr" wrap="square" lIns="228600" tIns="182880" rIns="228600"/>
-          <a:lstStyle/>
-          <a:p>
-            <a:pPr algn="ctr">
-              <a:defRPr sz="1600" b="1">
-                <a:solidFill>
-                  <a:srgbClr val="FFFFFF"/>
-                </a:solidFill>
-              </a:defRPr>
-            </a:pPr>
-            <a:r>
-              <a:t>Strategic Takeaways</a:t>
-            </a:r>
-          </a:p>
-          <a:p>
-            <a:br/>
-            <a:pPr>
-              <a:defRPr sz="1400">
-                <a:solidFill>
-                  <a:srgbClr val="F1F5F9"/>
-                </a:solidFill>
-              </a:defRPr>
-            </a:pPr>
-            <a:r>
-              <a:t>• Targeted optimization beats blanket discounts by 4.2x in net profit margin.</a:t>
-            </a:r>
-            <a:br/>
-            <a:r>
-              <a:t>• Budget allocation prioritized by Net ROI / Cost efficiency maximizes return under strict capital constraints.</a:t>
-            </a:r>
-          </a:p>
-        </p:txBody>
-      </p:sp>
-    </p:spTree>
-  </p:cSld>
-  <p:clrMapOvr>
-    <a:masterClrMapping/>
-  </p:clrMapOvr>
-</p:sld>
-</file>
-
-<file path=ppt/slides/slide9.xml><?xml version="1.0" encoding="utf-8"?>
-<p:sld xmlns:a="http://schemas.openxmlformats.org/drawingml/2006/main" xmlns:p="http://schemas.openxmlformats.org/presentationml/2006/main" xmlns:r="http://schemas.openxmlformats.org/officeDocument/2006/relationships">
-  <p:cSld>
-    <p:spTree>
-      <p:nvGrpSpPr>
-        <p:cNvPr id="1" name=""/>
-        <p:cNvGrpSpPr/>
-        <p:nvPr/>
-      </p:nvGrpSpPr>
-      <p:grpSpPr/>
-      <p:sp>
-        <p:nvSpPr>
-          <p:cNvPr id="2" name="Rectangle 1"/>
-          <p:cNvSpPr/>
-          <p:nvPr/>
-        </p:nvSpPr>
-        <p:spPr>
-          <a:xfrm>
-            <a:off x="0" y="0"/>
-            <a:ext cx="12191695" cy="1005840"/>
-          </a:xfrm>
-          <a:prstGeom prst="rect">
-            <a:avLst/>
-          </a:prstGeom>
-          <a:solidFill>
-            <a:srgbClr val="0F172A"/>
-          </a:solidFill>
-          <a:ln>
-            <a:noFill/>
-          </a:ln>
-        </p:spPr>
-        <p:style>
-          <a:lnRef idx="1">
-            <a:schemeClr val="accent1"/>
-          </a:lnRef>
-          <a:fillRef idx="3">
-            <a:schemeClr val="accent1"/>
-          </a:fillRef>
-          <a:effectRef idx="2">
-            <a:schemeClr val="accent1"/>
-          </a:effectRef>
-          <a:fontRef idx="minor">
-            <a:schemeClr val="lt1"/>
-          </a:fontRef>
-        </p:style>
-        <p:txBody>
-          <a:bodyPr rtlCol="0" anchor="ctr" wrap="square" lIns="731520" tIns="137160"/>
-          <a:lstStyle/>
-          <a:p>
-            <a:pPr algn="ctr">
-              <a:defRPr sz="1100" b="1">
-                <a:solidFill>
-                  <a:srgbClr val="0EA5E9"/>
-                </a:solidFill>
-              </a:defRPr>
-            </a:pPr>
-            <a:r>
-              <a:t>FINTECH CHURN &amp; RETENTION ROI ENGINE</a:t>
-            </a:r>
-          </a:p>
-          <a:p>
-            <a:pPr>
-              <a:defRPr sz="2200" b="1">
-                <a:solidFill>
-                  <a:srgbClr val="FFFFFF"/>
-                </a:solidFill>
-              </a:defRPr>
-            </a:pPr>
-            <a:r>
-              <a:t>Interactive Streamlit Strategy Dashboard</a:t>
+              <a:t>Interactive Streamlit Strategy Dashboard (app.py)</a:t>
             </a:r>
           </a:p>
         </p:txBody>
@@ -5634,7 +4629,7 @@
               </a:defRPr>
             </a:pPr>
             <a:r>
-              <a:t>Operational Features for FinTech Product Managers</a:t>
+              <a:t>Operational Decision-Support App for Risk &amp; Product Managers</a:t>
             </a:r>
           </a:p>
           <a:p>
@@ -5647,22 +4642,22 @@
               </a:defRPr>
             </a:pPr>
             <a:r>
-              <a:t>1. Executive Portfolio View: Live metrics on at-risk revenue, churn deciles, and tier distributions.</a:t>
-            </a:r>
-            <a:br/>
-            <a:br/>
-            <a:r>
-              <a:t>2. Model &amp; SHAP Inspector: Visualizing global feature contributions and model calibration.</a:t>
-            </a:r>
-            <a:br/>
-            <a:br/>
-            <a:r>
-              <a:t>3. Customer Lookup &amp; Recommendation Engine: Deep-dive into individual cardholders with automated offer suggestions.</a:t>
-            </a:r>
-            <a:br/>
-            <a:br/>
-            <a:r>
-              <a:t>4. What-If ROI Simulator: Real-time budget sliders to test portfolio campaign scenarios.</a:t>
+              <a:t>• Executive Portfolio Overview: Live metrics on at-risk revenue, churn deciles, and tier distributions.</a:t>
+            </a:r>
+            <a:br/>
+            <a:br/>
+            <a:r>
+              <a:t>• Machine Learning &amp; SHAP Inspector: Visualizing global feature contributions and model calibration.</a:t>
+            </a:r>
+            <a:br/>
+            <a:br/>
+            <a:r>
+              <a:t>• Individual Account Lookup: Deep-dive into specific cardholders with automated offer suggestions.</a:t>
+            </a:r>
+            <a:br/>
+            <a:br/>
+            <a:r>
+              <a:t>• What-If ROI Simulator: Real-time budget sliders to test portfolio campaign scenarios.</a:t>
             </a:r>
           </a:p>
         </p:txBody>

--- a/exports/FinTech_Churn_Retention_Strategy.pptx
+++ b/exports/FinTech_Churn_Retention_Strategy.pptx
@@ -3199,7 +3199,7 @@
               </a:defRPr>
             </a:pPr>
             <a:r>
-              <a:t>Headline Results: 483% Simulated Net Campaign ROI  •  $2.41M Net Profit Saved under $500k Budget Cap</a:t>
+              <a:t>Headline Results: 593% Base Net ROI  •  $592k Net Profit Saved under $100k Budget Cap</a:t>
             </a:r>
           </a:p>
         </p:txBody>
@@ -3831,17 +3831,17 @@
               </a:defRPr>
             </a:pPr>
             <a:r>
-              <a:t>• XGBoost Classifier ROC-AUC: 0.7848</a:t>
-            </a:r>
-            <a:br/>
-            <a:br/>
-            <a:r>
-              <a:t>• Baseline Logistic Regression AUC: 0.7721</a:t>
-            </a:r>
-            <a:br/>
-            <a:br/>
-            <a:r>
-              <a:t>• Top 20% Risk Decile Capture Rate: &gt;55% of all true default/churn accounts</a:t>
+              <a:t>• ECOA Fair Lending: Age &amp; protected demographics explicitly excluded.</a:t>
+            </a:r>
+            <a:br/>
+            <a:br/>
+            <a:r>
+              <a:t>• XGBoost Test ROC-AUC: 0.7789 | PR-AUC: 0.5618</a:t>
+            </a:r>
+            <a:br/>
+            <a:br/>
+            <a:r>
+              <a:t>• Top 20% Risk Decile Capture: 51.66% on Test Set</a:t>
             </a:r>
             <a:br/>
             <a:br/>
@@ -4075,12 +4075,12 @@
               </a:defRPr>
             </a:pPr>
             <a:r>
-              <a:t>LTV = Annual Net Margin × [ 1 / (Churn Prob + Discount Rate) ]</a:t>
-            </a:r>
-            <a:br/>
-            <a:br/>
-            <a:r>
-              <a:t>• Net Margin = (Interchange + Fees + Interest) - (Rewards + Servicing)</a:t>
+              <a:t>LTV = Annual Net Margin × Min( 3 Yrs, 1 / (Churn Prob + Discount) )</a:t>
+            </a:r>
+            <a:br/>
+            <a:br/>
+            <a:r>
+              <a:t>• Net Margin (USD) = (Interchange + Fees + Interest) - (Rewards + Servicing)</a:t>
             </a:r>
             <a:br/>
             <a:br/>
@@ -4155,7 +4155,7 @@
               </a:defRPr>
             </a:pPr>
             <a:r>
-              <a:t>1. Annual Fee Waiver: Waives $50–$495 fee for fee-dissatisfied users.</a:t>
+              <a:t>1. Annual Fee Waiver: Waives $50–$95 fee for fee-dissatisfied users.</a:t>
             </a:r>
             <a:br/>
             <a:r>
@@ -4163,7 +4163,7 @@
             </a:r>
             <a:br/>
             <a:r>
-              <a:t>3. 0% APR Cut / Relief: $120 interest margin discount for revolvers.</a:t>
+              <a:t>3. 0% APR Cut / Relief: Interest margin discount for revolvers.</a:t>
             </a:r>
             <a:br/>
             <a:r>
@@ -4303,7 +4303,7 @@
               </a:defRPr>
             </a:pPr>
             <a:r>
-              <a:t>Portfolio Performance Breakdown ($500k Budget Cap)</a:t>
+              <a:t>Portfolio Performance Breakdown ($100k Budget Cap)</a:t>
             </a:r>
           </a:p>
           <a:p>
@@ -4316,27 +4316,27 @@
               </a:defRPr>
             </a:pPr>
             <a:r>
-              <a:t>• Total Unmitigated At-Risk LTV Exposure:  $1.48M+</a:t>
-            </a:r>
-            <a:br/>
-            <a:r>
-              <a:t>• Total Campaign Budget Allocated:       $500,000</a:t>
-            </a:r>
-            <a:br/>
-            <a:r>
-              <a:t>• Targeted High-Risk Accounts:            3,194 / 30,000 (10.6%)</a:t>
-            </a:r>
-            <a:br/>
-            <a:r>
-              <a:t>• Gross Retained LTV Saved:               $2.91M+</a:t>
-            </a:r>
-            <a:br/>
-            <a:r>
-              <a:t>• Net Retained Profit Saved:              $2.41M+</a:t>
-            </a:r>
-            <a:br/>
-            <a:r>
-              <a:t>• Portfolio Campaign Net ROI:             483.0%</a:t>
+              <a:t>• Total Portfolio Accounts Evaluated:    30,000 accounts</a:t>
+            </a:r>
+            <a:br/>
+            <a:r>
+              <a:t>• Campaign Retention Budget Cap:       $100,000.00</a:t>
+            </a:r>
+            <a:br/>
+            <a:r>
+              <a:t>• Targeted High-Risk Accounts:          752 / 30,000 (2.5%)</a:t>
+            </a:r>
+            <a:br/>
+            <a:r>
+              <a:t>• Gross Retained LTV Saved:             $692,132.81</a:t>
+            </a:r>
+            <a:br/>
+            <a:r>
+              <a:t>• Net Profit Saved (Base Scenario):     $592,312.81 (593.4% ROI)</a:t>
+            </a:r>
+            <a:br/>
+            <a:r>
+              <a:t>• Net Profit Saved (50% Sensitivity):   $246,246.41 (246.7% ROI)</a:t>
             </a:r>
           </a:p>
         </p:txBody>

--- a/exports/FinTech_Churn_Retention_Strategy.pptx
+++ b/exports/FinTech_Churn_Retention_Strategy.pptx
@@ -3199,7 +3199,7 @@
               </a:defRPr>
             </a:pPr>
             <a:r>
-              <a:t>Headline Results: 593% Base Net ROI  •  $592k Net Profit Saved under $100k Budget Cap</a:t>
+              <a:t>Headline Results: 247% – 593% Net ROI Range  •  $246k – $592k Net Profit Saved ($100k Budget Cap)</a:t>
             </a:r>
           </a:p>
         </p:txBody>
@@ -3351,12 +3351,12 @@
             <a:br/>
             <a:br/>
             <a:r>
-              <a:t>• High-spending and high-limit cardholders drive over 60% of total portfolio net margin.</a:t>
-            </a:r>
-            <a:br/>
-            <a:br/>
-            <a:r>
-              <a:t>• Acquiring a replacement customer costs $250–$600 (CAC).</a:t>
+              <a:t>• High-limit and high-spending cardholders generate significant portfolio net margin.</a:t>
+            </a:r>
+            <a:br/>
+            <a:br/>
+            <a:r>
+              <a:t>• Customer churn erases years of accumulated interchange and fee margin.</a:t>
             </a:r>
           </a:p>
         </p:txBody>
@@ -3421,12 +3421,12 @@
               </a:defRPr>
             </a:pPr>
             <a:r>
-              <a:t>• Credit default/attrition erases years of accumulated interchange margin.</a:t>
-            </a:r>
-            <a:br/>
-            <a:br/>
-            <a:r>
               <a:t>• Generic retention offers (blanket credits) waste capital on low-risk cardholders.</a:t>
+            </a:r>
+            <a:br/>
+            <a:br/>
+            <a:r>
+              <a:t>• Low-LTV accounts absorb retention spend without delivering positive ROI.</a:t>
             </a:r>
             <a:br/>
             <a:br/>
@@ -3498,12 +3498,12 @@
               </a:defRPr>
             </a:pPr>
             <a:r>
-              <a:t>1. ML Default Risk Scoring: Identify high-risk accounts 60-90 days early.</a:t>
-            </a:r>
-            <a:br/>
-            <a:br/>
-            <a:r>
-              <a:t>2. SHAP Trigger Diagnostics: Pinpoint friction (delinquency vs utilization vs fees).</a:t>
+              <a:t>1. ML Risk Scoring: Identify high-risk accounts using behavioral time-series.</a:t>
+            </a:r>
+            <a:br/>
+            <a:br/>
+            <a:r>
+              <a:t>2. TreeSHAP Root Cause: Pinpoint friction (delinquency vs utilization vs fees).</a:t>
             </a:r>
             <a:br/>
             <a:br/>
@@ -3684,7 +3684,7 @@
             </a:r>
             <a:br/>
             <a:r>
-              <a:t>[XGBoost Churn/Default Model] ──&gt; [SHAP Root-Cause Diagnostics] ──&gt; [Knapsack ROI Optimization Engine]</a:t>
+              <a:t>[XGBoost Churn/Default Model] ──&gt; [TreeSHAP Root-Cause Diagnostics] ──&gt; [Knapsack ROI Optimization Engine]</a:t>
             </a:r>
           </a:p>
         </p:txBody>
@@ -3766,7 +3766,7 @@
               </a:defRPr>
             </a:pPr>
             <a:r>
-              <a:t>Machine Learning Performance &amp; SHAP Drivers</a:t>
+              <a:t>Machine Learning Performance &amp; TreeSHAP Drivers</a:t>
             </a:r>
           </a:p>
         </p:txBody>
@@ -3818,7 +3818,7 @@
               </a:defRPr>
             </a:pPr>
             <a:r>
-              <a:t>Model Accuracy Metrics</a:t>
+              <a:t>Model Performance Metrics</a:t>
             </a:r>
           </a:p>
           <a:p>
@@ -3831,7 +3831,7 @@
               </a:defRPr>
             </a:pPr>
             <a:r>
-              <a:t>• ECOA Fair Lending: Age &amp; protected demographics explicitly excluded.</a:t>
+              <a:t>• Fair Lending Practice: Protected demographics (Age, Sex, Marriage) excluded.</a:t>
             </a:r>
             <a:br/>
             <a:br/>
@@ -3900,35 +3900,40 @@
               </a:defRPr>
             </a:pPr>
             <a:r>
-              <a:t>Top SHAP Default Triggers</a:t>
+              <a:t>Top Empirical TreeSHAP Drivers</a:t>
             </a:r>
           </a:p>
           <a:p>
             <a:br/>
             <a:pPr>
-              <a:defRPr sz="1300">
+              <a:defRPr sz="1200">
                 <a:solidFill>
                   <a:srgbClr val="F1F5F9"/>
                 </a:solidFill>
               </a:defRPr>
             </a:pPr>
             <a:r>
-              <a:t>1. PAY_0 (Recent Repayment Delay): Strongest empirical default predictor.</a:t>
-            </a:r>
-            <a:br/>
-            <a:br/>
-            <a:r>
-              <a:t>2. Current Utilization Ratio: High utilization (&gt;75%) signals debt stress.</a:t>
-            </a:r>
-            <a:br/>
-            <a:br/>
-            <a:r>
-              <a:t>3. 6-Month Pay-to-Bill Ratio: Identifies revolvers paying minimum balance.</a:t>
-            </a:r>
-            <a:br/>
-            <a:br/>
-            <a:r>
-              <a:t>4. Credit Limit (LIMIT_BAL): Dictates total potential LTV margin exposure.</a:t>
+              <a:t>1. max_delay_months: Maximum delinquency status across statement window.</a:t>
+            </a:r>
+            <a:br/>
+            <a:br/>
+            <a:r>
+              <a:t>2. days_since_last_txn: Inactivity recency proxy.</a:t>
+            </a:r>
+            <a:br/>
+            <a:br/>
+            <a:r>
+              <a:t>3. support_friction_score: Delinquency escalation composite score.</a:t>
+            </a:r>
+            <a:br/>
+            <a:br/>
+            <a:r>
+              <a:t>4. current_utilization: Credit line utilization ratio.</a:t>
+            </a:r>
+            <a:br/>
+            <a:br/>
+            <a:r>
+              <a:t>*Note: Delinquency &amp; utilization signals overlap heavily (repayment delay dominates risk).</a:t>
             </a:r>
           </a:p>
         </p:txBody>
@@ -4155,7 +4160,7 @@
               </a:defRPr>
             </a:pPr>
             <a:r>
-              <a:t>1. Annual Fee Waiver: Waives $50–$95 fee for fee-dissatisfied users.</a:t>
+              <a:t>1. Annual Fee Waiver: Waives $95–$495 fee for fee-dissatisfied users.</a:t>
             </a:r>
             <a:br/>
             <a:r>
@@ -4336,7 +4341,7 @@
             </a:r>
             <a:br/>
             <a:r>
-              <a:t>• Net Profit Saved (50% Sensitivity):   $246,246.41 (246.7% ROI)</a:t>
+              <a:t>• Net Profit Saved (50% Haircut Sens):  $246,246.41 (246.7% ROI)</a:t>
             </a:r>
           </a:p>
         </p:txBody>

--- a/exports/FinTech_Churn_Retention_Strategy.pptx
+++ b/exports/FinTech_Churn_Retention_Strategy.pptx
@@ -3831,7 +3831,7 @@
               </a:defRPr>
             </a:pPr>
             <a:r>
-              <a:t>• Fair Lending Practice: Protected demographics (Age, Sex, Marriage) excluded.</a:t>
+              <a:t>• Fair Lending Practice: Protected demographic attributes (Age, Sex, Marriage) excluded from model inputs.</a:t>
             </a:r>
             <a:br/>
             <a:br/>
@@ -3841,12 +3841,12 @@
             <a:br/>
             <a:br/>
             <a:r>
-              <a:t>• Top 20% Risk Decile Capture: 51.66% on Test Set</a:t>
-            </a:r>
-            <a:br/>
-            <a:br/>
-            <a:r>
-              <a:t>• Enables hyper-targeted interventions without spamming low-risk cardholders.</a:t>
+              <a:t>• Baseline Logistic Regression Test AUC: 0.7670</a:t>
+            </a:r>
+            <a:br/>
+            <a:br/>
+            <a:r>
+              <a:t>• Top 20% Risk Decile Capture: 51.66% on a held-out test set.</a:t>
             </a:r>
           </a:p>
         </p:txBody>
@@ -3933,7 +3933,7 @@
             <a:br/>
             <a:br/>
             <a:r>
-              <a:t>*Note: Delinquency &amp; utilization signals overlap heavily (repayment delay dominates risk).</a:t>
+              <a:t>*Note: Delinquency &amp; utilization signals overlap heavily (repayment delay dominates default risk).</a:t>
             </a:r>
           </a:p>
         </p:txBody>
@@ -4095,7 +4095,7 @@
             <a:br/>
             <a:br/>
             <a:r>
-              <a:t>• Prevents spending $150 offer on an account with only $80 in remaining LTV.</a:t>
+              <a:t>• Prevents spending an offer whose cost exceeds remaining LTV (e.g. illustrative $150 offer vs $80 LTV).</a:t>
             </a:r>
           </a:p>
         </p:txBody>
@@ -4329,7 +4329,7 @@
             </a:r>
             <a:br/>
             <a:r>
-              <a:t>• Targeted High-Risk Accounts:          752 / 30,000 (2.5%)</a:t>
+              <a:t>• Targeted High-Risk Accounts:          752 / 30,000 (Top 2.5% of portfolio by ROI density)</a:t>
             </a:r>
             <a:br/>
             <a:r>

--- a/exports/FinTech_Churn_Retention_Strategy.pptx
+++ b/exports/FinTech_Churn_Retention_Strategy.pptx
@@ -3831,7 +3831,7 @@
               </a:defRPr>
             </a:pPr>
             <a:r>
-              <a:t>• Fair Lending Practice: Protected demographic attributes (Age, Sex, Marriage) excluded from model inputs.</a:t>
+              <a:t>• Fair Lending Practice: Protected demographic attributes (Age, Sex, Marriage, Education) excluded from model inputs.</a:t>
             </a:r>
             <a:br/>
             <a:br/>
@@ -4652,7 +4652,7 @@
             <a:br/>
             <a:br/>
             <a:r>
-              <a:t>• Machine Learning &amp; SHAP Inspector: Visualizing global feature contributions and model calibration.</a:t>
+              <a:t>• Machine Learning &amp; TreeSHAP Inspector: Visualizing global feature contributions and model calibration.</a:t>
             </a:r>
             <a:br/>
             <a:br/>

--- a/exports/FinTech_Churn_Retention_Strategy.pptx
+++ b/exports/FinTech_Churn_Retention_Strategy.pptx
@@ -4483,24 +4483,24 @@
           <a:p>
             <a:br/>
             <a:pPr>
-              <a:defRPr sz="1500">
+              <a:defRPr sz="1400">
                 <a:solidFill>
                   <a:srgbClr val="F1F5F9"/>
                 </a:solidFill>
               </a:defRPr>
             </a:pPr>
             <a:r>
-              <a:t>1. Pilot Top-Decile Campaign: Roll out automated offer dispatches to top 2 risk deciles.</a:t>
-            </a:r>
-            <a:br/>
-            <a:br/>
-            <a:r>
-              <a:t>2. Replace Simulated Multipliers with Causal A/B Testing: Calibration of treatment effect assumptions against live production experimental data.</a:t>
-            </a:r>
-            <a:br/>
-            <a:br/>
-            <a:r>
-              <a:t>3. Extend Model to True Attrition Data: Connect credit default signals to account-closure events when attrition logs become available.</a:t>
+              <a:t>1. Pilot on the 752 Recommended Accounts: Deploy retention offers to the optimal ROI-density cohort with a randomized holdout control group.</a:t>
+            </a:r>
+            <a:br/>
+            <a:br/>
+            <a:r>
+              <a:t>2. Replace Simulated Multipliers with Causal A/B Testing: Measure true empirical uplift and acceptance rates to replace scenario assumptions.</a:t>
+            </a:r>
+            <a:br/>
+            <a:br/>
+            <a:r>
+              <a:t>3. Connect Financial Distress to True Attrition: Transition the target from payment default proxy to account-closure events as ledger data matures.</a:t>
             </a:r>
           </a:p>
         </p:txBody>
